--- a/docs/ppt/析知XiZhi-作品介绍-最终版.pptx
+++ b/docs/ppt/析知XiZhi-作品介绍-最终版.pptx
@@ -1,23 +1,23 @@
 
 <file path=ppt/presentation.xml><?xml version="1.0" encoding="utf-8"?>
-<p:presentation xmlns:a="http://schemas.openxmlformats.org/drawingml/2006/main" xmlns:r="http://schemas.openxmlformats.org/officeDocument/2006/relationships" xmlns:p="http://schemas.openxmlformats.org/presentationml/2006/main" saveSubsetFonts="1" autoCompressPictures="0">
+<p:presentation xmlns:a="http://schemas.openxmlformats.org/drawingml/2006/main" xmlns:r="http://schemas.openxmlformats.org/officeDocument/2006/relationships" xmlns:p="http://schemas.openxmlformats.org/presentationml/2006/main" autoCompressPictures="0">
   <p:sldMasterIdLst>
     <p:sldMasterId id="2147483648" r:id="rId1"/>
   </p:sldMasterIdLst>
   <p:sldIdLst>
-    <p:sldId id="256" r:id="rId7"/>
-    <p:sldId id="257" r:id="rId8"/>
-    <p:sldId id="258" r:id="rId9"/>
-    <p:sldId id="259" r:id="rId10"/>
-    <p:sldId id="260" r:id="rId11"/>
-    <p:sldId id="261" r:id="rId12"/>
-    <p:sldId id="262" r:id="rId13"/>
-    <p:sldId id="263" r:id="rId14"/>
-    <p:sldId id="264" r:id="rId15"/>
-    <p:sldId id="265" r:id="rId16"/>
-    <p:sldId id="266" r:id="rId17"/>
+    <p:sldId id="256" r:id="rId3"/>
+    <p:sldId id="257" r:id="rId4"/>
+    <p:sldId id="258" r:id="rId5"/>
+    <p:sldId id="259" r:id="rId6"/>
+    <p:sldId id="260" r:id="rId7"/>
+    <p:sldId id="261" r:id="rId8"/>
+    <p:sldId id="262" r:id="rId9"/>
+    <p:sldId id="263" r:id="rId10"/>
+    <p:sldId id="264" r:id="rId11"/>
+    <p:sldId id="265" r:id="rId12"/>
+    <p:sldId id="266" r:id="rId13"/>
   </p:sldIdLst>
-  <p:sldSz cx="12191695" cy="6858000" type="screen4x3"/>
+  <p:sldSz cx="12191365" cy="6858000" type="screen4x3"/>
   <p:notesSz cx="6858000" cy="9144000"/>
   <p:defaultTextStyle>
     <a:defPPr>
@@ -114,6 +114,22 @@
       </a:defRPr>
     </a:lvl9pPr>
   </p:defaultTextStyle>
+  <p:extLst>
+    <p:ext uri="{EFAFB233-063F-42B5-8137-9DF3F51BA10A}">
+      <p15:sldGuideLst xmlns:p15="http://schemas.microsoft.com/office/powerpoint/2012/main">
+        <p15:guide id="1" orient="horz" pos="2160" userDrawn="1">
+          <p15:clr>
+            <a:srgbClr val="A4A3A4"/>
+          </p15:clr>
+        </p15:guide>
+        <p15:guide id="2" pos="2880" userDrawn="1">
+          <p15:clr>
+            <a:srgbClr val="A4A3A4"/>
+          </p15:clr>
+        </p15:guide>
+      </p15:sldGuideLst>
+    </p:ext>
+  </p:extLst>
 </p:presentation>
 </file>
 
@@ -298,7 +314,6 @@
           <a:p>
             <a:fld id="{5BCAD085-E8A6-8845-BD4E-CB4CCA059FC4}" type="datetimeFigureOut">
               <a:rPr lang="en-US" smtClean="0"/>
-              <a:t>1/27/13</a:t>
             </a:fld>
             <a:endParaRPr lang="en-US"/>
           </a:p>
@@ -340,18 +355,12 @@
           <a:p>
             <a:fld id="{C1FF6DA9-008F-8B48-92A6-B652298478BF}" type="slidenum">
               <a:rPr lang="en-US" smtClean="0"/>
-              <a:t>‹#›</a:t>
             </a:fld>
             <a:endParaRPr lang="en-US"/>
           </a:p>
         </p:txBody>
       </p:sp>
     </p:spTree>
-    <p:extLst>
-      <p:ext uri="{BB962C8B-B14F-4D97-AF65-F5344CB8AC3E}">
-        <p14:creationId xmlns:p14="http://schemas.microsoft.com/office/powerpoint/2010/main" val="3168075583"/>
-      </p:ext>
-    </p:extLst>
   </p:cSld>
   <p:clrMapOvr>
     <a:masterClrMapping/>
@@ -419,6 +428,7 @@
               <a:rPr lang="en-US" smtClean="0"/>
               <a:t>Click to edit Master text styles</a:t>
             </a:r>
+            <a:endParaRPr lang="en-US" smtClean="0"/>
           </a:p>
           <a:p>
             <a:pPr lvl="1"/>
@@ -426,6 +436,7 @@
               <a:rPr lang="en-US" smtClean="0"/>
               <a:t>Second level</a:t>
             </a:r>
+            <a:endParaRPr lang="en-US" smtClean="0"/>
           </a:p>
           <a:p>
             <a:pPr lvl="2"/>
@@ -433,6 +444,7 @@
               <a:rPr lang="en-US" smtClean="0"/>
               <a:t>Third level</a:t>
             </a:r>
+            <a:endParaRPr lang="en-US" smtClean="0"/>
           </a:p>
           <a:p>
             <a:pPr lvl="3"/>
@@ -440,6 +452,7 @@
               <a:rPr lang="en-US" smtClean="0"/>
               <a:t>Fourth level</a:t>
             </a:r>
+            <a:endParaRPr lang="en-US" smtClean="0"/>
           </a:p>
           <a:p>
             <a:pPr lvl="4"/>
@@ -468,7 +481,6 @@
           <a:p>
             <a:fld id="{5BCAD085-E8A6-8845-BD4E-CB4CCA059FC4}" type="datetimeFigureOut">
               <a:rPr lang="en-US" smtClean="0"/>
-              <a:t>1/27/13</a:t>
             </a:fld>
             <a:endParaRPr lang="en-US"/>
           </a:p>
@@ -510,18 +522,12 @@
           <a:p>
             <a:fld id="{C1FF6DA9-008F-8B48-92A6-B652298478BF}" type="slidenum">
               <a:rPr lang="en-US" smtClean="0"/>
-              <a:t>‹#›</a:t>
             </a:fld>
             <a:endParaRPr lang="en-US"/>
           </a:p>
         </p:txBody>
       </p:sp>
     </p:spTree>
-    <p:extLst>
-      <p:ext uri="{BB962C8B-B14F-4D97-AF65-F5344CB8AC3E}">
-        <p14:creationId xmlns:p14="http://schemas.microsoft.com/office/powerpoint/2010/main" val="2910927964"/>
-      </p:ext>
-    </p:extLst>
   </p:cSld>
   <p:clrMapOvr>
     <a:masterClrMapping/>
@@ -599,6 +605,7 @@
               <a:rPr lang="en-US" smtClean="0"/>
               <a:t>Click to edit Master text styles</a:t>
             </a:r>
+            <a:endParaRPr lang="en-US" smtClean="0"/>
           </a:p>
           <a:p>
             <a:pPr lvl="1"/>
@@ -606,6 +613,7 @@
               <a:rPr lang="en-US" smtClean="0"/>
               <a:t>Second level</a:t>
             </a:r>
+            <a:endParaRPr lang="en-US" smtClean="0"/>
           </a:p>
           <a:p>
             <a:pPr lvl="2"/>
@@ -613,6 +621,7 @@
               <a:rPr lang="en-US" smtClean="0"/>
               <a:t>Third level</a:t>
             </a:r>
+            <a:endParaRPr lang="en-US" smtClean="0"/>
           </a:p>
           <a:p>
             <a:pPr lvl="3"/>
@@ -620,6 +629,7 @@
               <a:rPr lang="en-US" smtClean="0"/>
               <a:t>Fourth level</a:t>
             </a:r>
+            <a:endParaRPr lang="en-US" smtClean="0"/>
           </a:p>
           <a:p>
             <a:pPr lvl="4"/>
@@ -648,7 +658,6 @@
           <a:p>
             <a:fld id="{5BCAD085-E8A6-8845-BD4E-CB4CCA059FC4}" type="datetimeFigureOut">
               <a:rPr lang="en-US" smtClean="0"/>
-              <a:t>1/27/13</a:t>
             </a:fld>
             <a:endParaRPr lang="en-US"/>
           </a:p>
@@ -690,18 +699,12 @@
           <a:p>
             <a:fld id="{C1FF6DA9-008F-8B48-92A6-B652298478BF}" type="slidenum">
               <a:rPr lang="en-US" smtClean="0"/>
-              <a:t>‹#›</a:t>
             </a:fld>
             <a:endParaRPr lang="en-US"/>
           </a:p>
         </p:txBody>
       </p:sp>
     </p:spTree>
-    <p:extLst>
-      <p:ext uri="{BB962C8B-B14F-4D97-AF65-F5344CB8AC3E}">
-        <p14:creationId xmlns:p14="http://schemas.microsoft.com/office/powerpoint/2010/main" val="3612223792"/>
-      </p:ext>
-    </p:extLst>
   </p:cSld>
   <p:clrMapOvr>
     <a:masterClrMapping/>
@@ -769,6 +772,7 @@
               <a:rPr lang="en-US" smtClean="0"/>
               <a:t>Click to edit Master text styles</a:t>
             </a:r>
+            <a:endParaRPr lang="en-US" smtClean="0"/>
           </a:p>
           <a:p>
             <a:pPr lvl="1"/>
@@ -776,6 +780,7 @@
               <a:rPr lang="en-US" smtClean="0"/>
               <a:t>Second level</a:t>
             </a:r>
+            <a:endParaRPr lang="en-US" smtClean="0"/>
           </a:p>
           <a:p>
             <a:pPr lvl="2"/>
@@ -783,6 +788,7 @@
               <a:rPr lang="en-US" smtClean="0"/>
               <a:t>Third level</a:t>
             </a:r>
+            <a:endParaRPr lang="en-US" smtClean="0"/>
           </a:p>
           <a:p>
             <a:pPr lvl="3"/>
@@ -790,6 +796,7 @@
               <a:rPr lang="en-US" smtClean="0"/>
               <a:t>Fourth level</a:t>
             </a:r>
+            <a:endParaRPr lang="en-US" smtClean="0"/>
           </a:p>
           <a:p>
             <a:pPr lvl="4"/>
@@ -818,7 +825,6 @@
           <a:p>
             <a:fld id="{5BCAD085-E8A6-8845-BD4E-CB4CCA059FC4}" type="datetimeFigureOut">
               <a:rPr lang="en-US" smtClean="0"/>
-              <a:t>1/27/13</a:t>
             </a:fld>
             <a:endParaRPr lang="en-US"/>
           </a:p>
@@ -860,18 +866,12 @@
           <a:p>
             <a:fld id="{C1FF6DA9-008F-8B48-92A6-B652298478BF}" type="slidenum">
               <a:rPr lang="en-US" smtClean="0"/>
-              <a:t>‹#›</a:t>
             </a:fld>
             <a:endParaRPr lang="en-US"/>
           </a:p>
         </p:txBody>
       </p:sp>
     </p:spTree>
-    <p:extLst>
-      <p:ext uri="{BB962C8B-B14F-4D97-AF65-F5344CB8AC3E}">
-        <p14:creationId xmlns:p14="http://schemas.microsoft.com/office/powerpoint/2010/main" val="2614314258"/>
-      </p:ext>
-    </p:extLst>
   </p:cSld>
   <p:clrMapOvr>
     <a:masterClrMapping/>
@@ -1044,6 +1044,7 @@
               <a:rPr lang="en-US" smtClean="0"/>
               <a:t>Click to edit Master text styles</a:t>
             </a:r>
+            <a:endParaRPr lang="en-US" smtClean="0"/>
           </a:p>
         </p:txBody>
       </p:sp>
@@ -1064,7 +1065,6 @@
           <a:p>
             <a:fld id="{5BCAD085-E8A6-8845-BD4E-CB4CCA059FC4}" type="datetimeFigureOut">
               <a:rPr lang="en-US" smtClean="0"/>
-              <a:t>1/27/13</a:t>
             </a:fld>
             <a:endParaRPr lang="en-US"/>
           </a:p>
@@ -1106,18 +1106,12 @@
           <a:p>
             <a:fld id="{C1FF6DA9-008F-8B48-92A6-B652298478BF}" type="slidenum">
               <a:rPr lang="en-US" smtClean="0"/>
-              <a:t>‹#›</a:t>
             </a:fld>
             <a:endParaRPr lang="en-US"/>
           </a:p>
         </p:txBody>
       </p:sp>
     </p:spTree>
-    <p:extLst>
-      <p:ext uri="{BB962C8B-B14F-4D97-AF65-F5344CB8AC3E}">
-        <p14:creationId xmlns:p14="http://schemas.microsoft.com/office/powerpoint/2010/main" val="960648375"/>
-      </p:ext>
-    </p:extLst>
   </p:cSld>
   <p:clrMapOvr>
     <a:masterClrMapping/>
@@ -1218,6 +1212,7 @@
               <a:rPr lang="en-US" smtClean="0"/>
               <a:t>Click to edit Master text styles</a:t>
             </a:r>
+            <a:endParaRPr lang="en-US" smtClean="0"/>
           </a:p>
           <a:p>
             <a:pPr lvl="1"/>
@@ -1225,6 +1220,7 @@
               <a:rPr lang="en-US" smtClean="0"/>
               <a:t>Second level</a:t>
             </a:r>
+            <a:endParaRPr lang="en-US" smtClean="0"/>
           </a:p>
           <a:p>
             <a:pPr lvl="2"/>
@@ -1232,6 +1228,7 @@
               <a:rPr lang="en-US" smtClean="0"/>
               <a:t>Third level</a:t>
             </a:r>
+            <a:endParaRPr lang="en-US" smtClean="0"/>
           </a:p>
           <a:p>
             <a:pPr lvl="3"/>
@@ -1239,6 +1236,7 @@
               <a:rPr lang="en-US" smtClean="0"/>
               <a:t>Fourth level</a:t>
             </a:r>
+            <a:endParaRPr lang="en-US" smtClean="0"/>
           </a:p>
           <a:p>
             <a:pPr lvl="4"/>
@@ -1303,6 +1301,7 @@
               <a:rPr lang="en-US" smtClean="0"/>
               <a:t>Click to edit Master text styles</a:t>
             </a:r>
+            <a:endParaRPr lang="en-US" smtClean="0"/>
           </a:p>
           <a:p>
             <a:pPr lvl="1"/>
@@ -1310,6 +1309,7 @@
               <a:rPr lang="en-US" smtClean="0"/>
               <a:t>Second level</a:t>
             </a:r>
+            <a:endParaRPr lang="en-US" smtClean="0"/>
           </a:p>
           <a:p>
             <a:pPr lvl="2"/>
@@ -1317,6 +1317,7 @@
               <a:rPr lang="en-US" smtClean="0"/>
               <a:t>Third level</a:t>
             </a:r>
+            <a:endParaRPr lang="en-US" smtClean="0"/>
           </a:p>
           <a:p>
             <a:pPr lvl="3"/>
@@ -1324,6 +1325,7 @@
               <a:rPr lang="en-US" smtClean="0"/>
               <a:t>Fourth level</a:t>
             </a:r>
+            <a:endParaRPr lang="en-US" smtClean="0"/>
           </a:p>
           <a:p>
             <a:pPr lvl="4"/>
@@ -1352,7 +1354,6 @@
           <a:p>
             <a:fld id="{5BCAD085-E8A6-8845-BD4E-CB4CCA059FC4}" type="datetimeFigureOut">
               <a:rPr lang="en-US" smtClean="0"/>
-              <a:t>1/27/13</a:t>
             </a:fld>
             <a:endParaRPr lang="en-US"/>
           </a:p>
@@ -1394,18 +1395,12 @@
           <a:p>
             <a:fld id="{C1FF6DA9-008F-8B48-92A6-B652298478BF}" type="slidenum">
               <a:rPr lang="en-US" smtClean="0"/>
-              <a:t>‹#›</a:t>
             </a:fld>
             <a:endParaRPr lang="en-US"/>
           </a:p>
         </p:txBody>
       </p:sp>
     </p:spTree>
-    <p:extLst>
-      <p:ext uri="{BB962C8B-B14F-4D97-AF65-F5344CB8AC3E}">
-        <p14:creationId xmlns:p14="http://schemas.microsoft.com/office/powerpoint/2010/main" val="2782244947"/>
-      </p:ext>
-    </p:extLst>
   </p:cSld>
   <p:clrMapOvr>
     <a:masterClrMapping/>
@@ -1519,6 +1514,7 @@
               <a:rPr lang="en-US" smtClean="0"/>
               <a:t>Click to edit Master text styles</a:t>
             </a:r>
+            <a:endParaRPr lang="en-US" smtClean="0"/>
           </a:p>
         </p:txBody>
       </p:sp>
@@ -1575,6 +1571,7 @@
               <a:rPr lang="en-US" smtClean="0"/>
               <a:t>Click to edit Master text styles</a:t>
             </a:r>
+            <a:endParaRPr lang="en-US" smtClean="0"/>
           </a:p>
           <a:p>
             <a:pPr lvl="1"/>
@@ -1582,6 +1579,7 @@
               <a:rPr lang="en-US" smtClean="0"/>
               <a:t>Second level</a:t>
             </a:r>
+            <a:endParaRPr lang="en-US" smtClean="0"/>
           </a:p>
           <a:p>
             <a:pPr lvl="2"/>
@@ -1589,6 +1587,7 @@
               <a:rPr lang="en-US" smtClean="0"/>
               <a:t>Third level</a:t>
             </a:r>
+            <a:endParaRPr lang="en-US" smtClean="0"/>
           </a:p>
           <a:p>
             <a:pPr lvl="3"/>
@@ -1596,6 +1595,7 @@
               <a:rPr lang="en-US" smtClean="0"/>
               <a:t>Fourth level</a:t>
             </a:r>
+            <a:endParaRPr lang="en-US" smtClean="0"/>
           </a:p>
           <a:p>
             <a:pPr lvl="4"/>
@@ -1669,6 +1669,7 @@
               <a:rPr lang="en-US" smtClean="0"/>
               <a:t>Click to edit Master text styles</a:t>
             </a:r>
+            <a:endParaRPr lang="en-US" smtClean="0"/>
           </a:p>
         </p:txBody>
       </p:sp>
@@ -1725,6 +1726,7 @@
               <a:rPr lang="en-US" smtClean="0"/>
               <a:t>Click to edit Master text styles</a:t>
             </a:r>
+            <a:endParaRPr lang="en-US" smtClean="0"/>
           </a:p>
           <a:p>
             <a:pPr lvl="1"/>
@@ -1732,6 +1734,7 @@
               <a:rPr lang="en-US" smtClean="0"/>
               <a:t>Second level</a:t>
             </a:r>
+            <a:endParaRPr lang="en-US" smtClean="0"/>
           </a:p>
           <a:p>
             <a:pPr lvl="2"/>
@@ -1739,6 +1742,7 @@
               <a:rPr lang="en-US" smtClean="0"/>
               <a:t>Third level</a:t>
             </a:r>
+            <a:endParaRPr lang="en-US" smtClean="0"/>
           </a:p>
           <a:p>
             <a:pPr lvl="3"/>
@@ -1746,6 +1750,7 @@
               <a:rPr lang="en-US" smtClean="0"/>
               <a:t>Fourth level</a:t>
             </a:r>
+            <a:endParaRPr lang="en-US" smtClean="0"/>
           </a:p>
           <a:p>
             <a:pPr lvl="4"/>
@@ -1774,7 +1779,6 @@
           <a:p>
             <a:fld id="{5BCAD085-E8A6-8845-BD4E-CB4CCA059FC4}" type="datetimeFigureOut">
               <a:rPr lang="en-US" smtClean="0"/>
-              <a:t>1/27/13</a:t>
             </a:fld>
             <a:endParaRPr lang="en-US"/>
           </a:p>
@@ -1816,18 +1820,12 @@
           <a:p>
             <a:fld id="{C1FF6DA9-008F-8B48-92A6-B652298478BF}" type="slidenum">
               <a:rPr lang="en-US" smtClean="0"/>
-              <a:t>‹#›</a:t>
             </a:fld>
             <a:endParaRPr lang="en-US"/>
           </a:p>
         </p:txBody>
       </p:sp>
     </p:spTree>
-    <p:extLst>
-      <p:ext uri="{BB962C8B-B14F-4D97-AF65-F5344CB8AC3E}">
-        <p14:creationId xmlns:p14="http://schemas.microsoft.com/office/powerpoint/2010/main" val="990158736"/>
-      </p:ext>
-    </p:extLst>
   </p:cSld>
   <p:clrMapOvr>
     <a:masterClrMapping/>
@@ -1892,7 +1890,6 @@
           <a:p>
             <a:fld id="{5BCAD085-E8A6-8845-BD4E-CB4CCA059FC4}" type="datetimeFigureOut">
               <a:rPr lang="en-US" smtClean="0"/>
-              <a:t>1/27/13</a:t>
             </a:fld>
             <a:endParaRPr lang="en-US"/>
           </a:p>
@@ -1934,18 +1931,12 @@
           <a:p>
             <a:fld id="{C1FF6DA9-008F-8B48-92A6-B652298478BF}" type="slidenum">
               <a:rPr lang="en-US" smtClean="0"/>
-              <a:t>‹#›</a:t>
             </a:fld>
             <a:endParaRPr lang="en-US"/>
           </a:p>
         </p:txBody>
       </p:sp>
     </p:spTree>
-    <p:extLst>
-      <p:ext uri="{BB962C8B-B14F-4D97-AF65-F5344CB8AC3E}">
-        <p14:creationId xmlns:p14="http://schemas.microsoft.com/office/powerpoint/2010/main" val="727027711"/>
-      </p:ext>
-    </p:extLst>
   </p:cSld>
   <p:clrMapOvr>
     <a:masterClrMapping/>
@@ -1987,7 +1978,6 @@
           <a:p>
             <a:fld id="{5BCAD085-E8A6-8845-BD4E-CB4CCA059FC4}" type="datetimeFigureOut">
               <a:rPr lang="en-US" smtClean="0"/>
-              <a:t>1/27/13</a:t>
             </a:fld>
             <a:endParaRPr lang="en-US"/>
           </a:p>
@@ -2029,18 +2019,12 @@
           <a:p>
             <a:fld id="{C1FF6DA9-008F-8B48-92A6-B652298478BF}" type="slidenum">
               <a:rPr lang="en-US" smtClean="0"/>
-              <a:t>‹#›</a:t>
             </a:fld>
             <a:endParaRPr lang="en-US"/>
           </a:p>
         </p:txBody>
       </p:sp>
     </p:spTree>
-    <p:extLst>
-      <p:ext uri="{BB962C8B-B14F-4D97-AF65-F5344CB8AC3E}">
-        <p14:creationId xmlns:p14="http://schemas.microsoft.com/office/powerpoint/2010/main" val="1212999818"/>
-      </p:ext>
-    </p:extLst>
   </p:cSld>
   <p:clrMapOvr>
     <a:masterClrMapping/>
@@ -2150,6 +2134,7 @@
               <a:rPr lang="en-US" smtClean="0"/>
               <a:t>Click to edit Master text styles</a:t>
             </a:r>
+            <a:endParaRPr lang="en-US" smtClean="0"/>
           </a:p>
           <a:p>
             <a:pPr lvl="1"/>
@@ -2157,6 +2142,7 @@
               <a:rPr lang="en-US" smtClean="0"/>
               <a:t>Second level</a:t>
             </a:r>
+            <a:endParaRPr lang="en-US" smtClean="0"/>
           </a:p>
           <a:p>
             <a:pPr lvl="2"/>
@@ -2164,6 +2150,7 @@
               <a:rPr lang="en-US" smtClean="0"/>
               <a:t>Third level</a:t>
             </a:r>
+            <a:endParaRPr lang="en-US" smtClean="0"/>
           </a:p>
           <a:p>
             <a:pPr lvl="3"/>
@@ -2171,6 +2158,7 @@
               <a:rPr lang="en-US" smtClean="0"/>
               <a:t>Fourth level</a:t>
             </a:r>
+            <a:endParaRPr lang="en-US" smtClean="0"/>
           </a:p>
           <a:p>
             <a:pPr lvl="4"/>
@@ -2244,6 +2232,7 @@
               <a:rPr lang="en-US" smtClean="0"/>
               <a:t>Click to edit Master text styles</a:t>
             </a:r>
+            <a:endParaRPr lang="en-US" smtClean="0"/>
           </a:p>
         </p:txBody>
       </p:sp>
@@ -2264,7 +2253,6 @@
           <a:p>
             <a:fld id="{5BCAD085-E8A6-8845-BD4E-CB4CCA059FC4}" type="datetimeFigureOut">
               <a:rPr lang="en-US" smtClean="0"/>
-              <a:t>1/27/13</a:t>
             </a:fld>
             <a:endParaRPr lang="en-US"/>
           </a:p>
@@ -2306,18 +2294,12 @@
           <a:p>
             <a:fld id="{C1FF6DA9-008F-8B48-92A6-B652298478BF}" type="slidenum">
               <a:rPr lang="en-US" smtClean="0"/>
-              <a:t>‹#›</a:t>
             </a:fld>
             <a:endParaRPr lang="en-US"/>
           </a:p>
         </p:txBody>
       </p:sp>
     </p:spTree>
-    <p:extLst>
-      <p:ext uri="{BB962C8B-B14F-4D97-AF65-F5344CB8AC3E}">
-        <p14:creationId xmlns:p14="http://schemas.microsoft.com/office/powerpoint/2010/main" val="1840726560"/>
-      </p:ext>
-    </p:extLst>
   </p:cSld>
   <p:clrMapOvr>
     <a:masterClrMapping/>
@@ -2497,6 +2479,7 @@
               <a:rPr lang="en-US" smtClean="0"/>
               <a:t>Click to edit Master text styles</a:t>
             </a:r>
+            <a:endParaRPr lang="en-US" smtClean="0"/>
           </a:p>
         </p:txBody>
       </p:sp>
@@ -2517,7 +2500,6 @@
           <a:p>
             <a:fld id="{5BCAD085-E8A6-8845-BD4E-CB4CCA059FC4}" type="datetimeFigureOut">
               <a:rPr lang="en-US" smtClean="0"/>
-              <a:t>1/27/13</a:t>
             </a:fld>
             <a:endParaRPr lang="en-US"/>
           </a:p>
@@ -2559,18 +2541,12 @@
           <a:p>
             <a:fld id="{C1FF6DA9-008F-8B48-92A6-B652298478BF}" type="slidenum">
               <a:rPr lang="en-US" smtClean="0"/>
-              <a:t>‹#›</a:t>
             </a:fld>
             <a:endParaRPr lang="en-US"/>
           </a:p>
         </p:txBody>
       </p:sp>
     </p:spTree>
-    <p:extLst>
-      <p:ext uri="{BB962C8B-B14F-4D97-AF65-F5344CB8AC3E}">
-        <p14:creationId xmlns:p14="http://schemas.microsoft.com/office/powerpoint/2010/main" val="3889236939"/>
-      </p:ext>
-    </p:extLst>
   </p:cSld>
   <p:clrMapOvr>
     <a:masterClrMapping/>
@@ -2663,6 +2639,7 @@
               <a:rPr lang="en-US" smtClean="0"/>
               <a:t>Click to edit Master text styles</a:t>
             </a:r>
+            <a:endParaRPr lang="en-US" smtClean="0"/>
           </a:p>
           <a:p>
             <a:pPr lvl="1"/>
@@ -2670,6 +2647,7 @@
               <a:rPr lang="en-US" smtClean="0"/>
               <a:t>Second level</a:t>
             </a:r>
+            <a:endParaRPr lang="en-US" smtClean="0"/>
           </a:p>
           <a:p>
             <a:pPr lvl="2"/>
@@ -2677,6 +2655,7 @@
               <a:rPr lang="en-US" smtClean="0"/>
               <a:t>Third level</a:t>
             </a:r>
+            <a:endParaRPr lang="en-US" smtClean="0"/>
           </a:p>
           <a:p>
             <a:pPr lvl="3"/>
@@ -2684,6 +2663,7 @@
               <a:rPr lang="en-US" smtClean="0"/>
               <a:t>Fourth level</a:t>
             </a:r>
+            <a:endParaRPr lang="en-US" smtClean="0"/>
           </a:p>
           <a:p>
             <a:pPr lvl="4"/>
@@ -2730,7 +2710,6 @@
           <a:p>
             <a:fld id="{5BCAD085-E8A6-8845-BD4E-CB4CCA059FC4}" type="datetimeFigureOut">
               <a:rPr lang="en-US" smtClean="0"/>
-              <a:t>1/27/13</a:t>
             </a:fld>
             <a:endParaRPr lang="en-US"/>
           </a:p>
@@ -2808,18 +2787,12 @@
           <a:p>
             <a:fld id="{C1FF6DA9-008F-8B48-92A6-B652298478BF}" type="slidenum">
               <a:rPr lang="en-US" smtClean="0"/>
-              <a:t>‹#›</a:t>
             </a:fld>
             <a:endParaRPr lang="en-US"/>
           </a:p>
         </p:txBody>
       </p:sp>
     </p:spTree>
-    <p:extLst>
-      <p:ext uri="{BB962C8B-B14F-4D97-AF65-F5344CB8AC3E}">
-        <p14:creationId xmlns:p14="http://schemas.microsoft.com/office/powerpoint/2010/main" val="2209977519"/>
-      </p:ext>
-    </p:extLst>
   </p:cSld>
   <p:clrMap bg1="lt1" tx1="dk1" bg2="lt2" tx2="dk2" accent1="accent1" accent2="accent2" accent3="accent3" accent4="accent4" accent5="accent5" accent6="accent6" hlink="hlink" folHlink="folHlink"/>
   <p:sldLayoutIdLst>
@@ -2857,7 +2830,7 @@
         <a:spcBef>
           <a:spcPct val="20000"/>
         </a:spcBef>
-        <a:buFont typeface="Arial"/>
+        <a:buFont typeface="Arial" panose="020B0604020202020204"/>
         <a:buChar char="•"/>
         <a:defRPr sz="3200" kern="1200">
           <a:solidFill>
@@ -2872,7 +2845,7 @@
         <a:spcBef>
           <a:spcPct val="20000"/>
         </a:spcBef>
-        <a:buFont typeface="Arial"/>
+        <a:buFont typeface="Arial" panose="020B0604020202020204"/>
         <a:buChar char="–"/>
         <a:defRPr sz="2800" kern="1200">
           <a:solidFill>
@@ -2887,7 +2860,7 @@
         <a:spcBef>
           <a:spcPct val="20000"/>
         </a:spcBef>
-        <a:buFont typeface="Arial"/>
+        <a:buFont typeface="Arial" panose="020B0604020202020204"/>
         <a:buChar char="•"/>
         <a:defRPr sz="2400" kern="1200">
           <a:solidFill>
@@ -2902,7 +2875,7 @@
         <a:spcBef>
           <a:spcPct val="20000"/>
         </a:spcBef>
-        <a:buFont typeface="Arial"/>
+        <a:buFont typeface="Arial" panose="020B0604020202020204"/>
         <a:buChar char="–"/>
         <a:defRPr sz="2000" kern="1200">
           <a:solidFill>
@@ -2917,7 +2890,7 @@
         <a:spcBef>
           <a:spcPct val="20000"/>
         </a:spcBef>
-        <a:buFont typeface="Arial"/>
+        <a:buFont typeface="Arial" panose="020B0604020202020204"/>
         <a:buChar char="»"/>
         <a:defRPr sz="2000" kern="1200">
           <a:solidFill>
@@ -2932,7 +2905,7 @@
         <a:spcBef>
           <a:spcPct val="20000"/>
         </a:spcBef>
-        <a:buFont typeface="Arial"/>
+        <a:buFont typeface="Arial" panose="020B0604020202020204"/>
         <a:buChar char="•"/>
         <a:defRPr sz="2000" kern="1200">
           <a:solidFill>
@@ -2947,7 +2920,7 @@
         <a:spcBef>
           <a:spcPct val="20000"/>
         </a:spcBef>
-        <a:buFont typeface="Arial"/>
+        <a:buFont typeface="Arial" panose="020B0604020202020204"/>
         <a:buChar char="•"/>
         <a:defRPr sz="2000" kern="1200">
           <a:solidFill>
@@ -2962,7 +2935,7 @@
         <a:spcBef>
           <a:spcPct val="20000"/>
         </a:spcBef>
-        <a:buFont typeface="Arial"/>
+        <a:buFont typeface="Arial" panose="020B0604020202020204"/>
         <a:buChar char="•"/>
         <a:defRPr sz="2000" kern="1200">
           <a:solidFill>
@@ -2977,7 +2950,7 @@
         <a:spcBef>
           <a:spcPct val="20000"/>
         </a:spcBef>
-        <a:buFont typeface="Arial"/>
+        <a:buFont typeface="Arial" panose="020B0604020202020204"/>
         <a:buChar char="•"/>
         <a:defRPr sz="2000" kern="1200">
           <a:solidFill>
@@ -3089,7 +3062,7 @@
 </file>
 
 <file path=ppt/slides/slide1.xml><?xml version="1.0" encoding="utf-8"?>
-<p:sld xmlns:a="http://schemas.openxmlformats.org/drawingml/2006/main" xmlns:p="http://schemas.openxmlformats.org/presentationml/2006/main" xmlns:r="http://schemas.openxmlformats.org/officeDocument/2006/relationships">
+<p:sld xmlns:a="http://schemas.openxmlformats.org/drawingml/2006/main" xmlns:r="http://schemas.openxmlformats.org/officeDocument/2006/relationships" xmlns:p="http://schemas.openxmlformats.org/presentationml/2006/main">
   <p:cSld>
     <p:spTree>
       <p:nvGrpSpPr>
@@ -3218,10 +3191,16 @@
                 <a:solidFill>
                   <a:srgbClr val="FFFFFF"/>
                 </a:solidFill>
-                <a:latin typeface="微软雅黑"/>
+                <a:latin typeface="微软雅黑" panose="020B0503020204020204" charset="-122"/>
               </a:rPr>
               <a:t>析</a:t>
             </a:r>
+            <a:endParaRPr sz="1700" b="1">
+              <a:solidFill>
+                <a:srgbClr val="FFFFFF"/>
+              </a:solidFill>
+              <a:latin typeface="微软雅黑" panose="020B0503020204020204" charset="-122"/>
+            </a:endParaRPr>
           </a:p>
         </p:txBody>
       </p:sp>
@@ -3257,10 +3236,16 @@
                 <a:solidFill>
                   <a:srgbClr val="64748B"/>
                 </a:solidFill>
-                <a:latin typeface="微软雅黑"/>
+                <a:latin typeface="微软雅黑" panose="020B0503020204020204" charset="-122"/>
               </a:rPr>
               <a:t>粤港澳大湾区 AI Coding 创新大赛 · 方向一「AI + 教学管理助手」</a:t>
             </a:r>
+            <a:endParaRPr sz="1400" b="0">
+              <a:solidFill>
+                <a:srgbClr val="64748B"/>
+              </a:solidFill>
+              <a:latin typeface="微软雅黑" panose="020B0503020204020204" charset="-122"/>
+            </a:endParaRPr>
           </a:p>
         </p:txBody>
       </p:sp>
@@ -3296,10 +3281,16 @@
                 <a:solidFill>
                   <a:srgbClr val="0F172A"/>
                 </a:solidFill>
-                <a:latin typeface="微软雅黑"/>
+                <a:latin typeface="微软雅黑" panose="020B0503020204020204" charset="-122"/>
               </a:rPr>
               <a:t>析知 XiZhi</a:t>
             </a:r>
+            <a:endParaRPr sz="6600" b="1">
+              <a:solidFill>
+                <a:srgbClr val="0F172A"/>
+              </a:solidFill>
+              <a:latin typeface="微软雅黑" panose="020B0503020204020204" charset="-122"/>
+            </a:endParaRPr>
           </a:p>
         </p:txBody>
       </p:sp>
@@ -3335,10 +3326,16 @@
                 <a:solidFill>
                   <a:srgbClr val="3B82F6"/>
                 </a:solidFill>
-                <a:latin typeface="微软雅黑"/>
+                <a:latin typeface="微软雅黑" panose="020B0503020204020204" charset="-122"/>
               </a:rPr>
               <a:t>多模态教学智能体</a:t>
             </a:r>
+            <a:endParaRPr sz="2600" b="1">
+              <a:solidFill>
+                <a:srgbClr val="3B82F6"/>
+              </a:solidFill>
+              <a:latin typeface="微软雅黑" panose="020B0503020204020204" charset="-122"/>
+            </a:endParaRPr>
           </a:p>
         </p:txBody>
       </p:sp>
@@ -3418,10 +3415,16 @@
                 <a:solidFill>
                   <a:srgbClr val="1A1A1A"/>
                 </a:solidFill>
-                <a:latin typeface="微软雅黑"/>
+                <a:latin typeface="微软雅黑" panose="020B0503020204020204" charset="-122"/>
               </a:rPr>
               <a:t>AI 预抽取 + 人工校验的知识点依赖图 · 可解释的学习路径与卡点根因回溯</a:t>
             </a:r>
+            <a:endParaRPr sz="1700" b="0">
+              <a:solidFill>
+                <a:srgbClr val="1A1A1A"/>
+              </a:solidFill>
+              <a:latin typeface="微软雅黑" panose="020B0503020204020204" charset="-122"/>
+            </a:endParaRPr>
           </a:p>
         </p:txBody>
       </p:sp>
@@ -3457,10 +3460,16 @@
                 <a:solidFill>
                   <a:srgbClr val="06B6D4"/>
                 </a:solidFill>
-                <a:latin typeface="Consolas"/>
+                <a:latin typeface="Consolas" panose="020B0609020204030204"/>
               </a:rPr>
               <a:t>3</a:t>
             </a:r>
+            <a:endParaRPr sz="2800" b="1">
+              <a:solidFill>
+                <a:srgbClr val="06B6D4"/>
+              </a:solidFill>
+              <a:latin typeface="Consolas" panose="020B0609020204030204"/>
+            </a:endParaRPr>
           </a:p>
         </p:txBody>
       </p:sp>
@@ -3496,10 +3505,16 @@
                 <a:solidFill>
                   <a:srgbClr val="64748B"/>
                 </a:solidFill>
-                <a:latin typeface="微软雅黑"/>
+                <a:latin typeface="微软雅黑" panose="020B0503020204020204" charset="-122"/>
               </a:rPr>
               <a:t>阶段管线</a:t>
             </a:r>
+            <a:endParaRPr sz="1200" b="0">
+              <a:solidFill>
+                <a:srgbClr val="64748B"/>
+              </a:solidFill>
+              <a:latin typeface="微软雅黑" panose="020B0503020204020204" charset="-122"/>
+            </a:endParaRPr>
           </a:p>
         </p:txBody>
       </p:sp>
@@ -3535,10 +3550,16 @@
                 <a:solidFill>
                   <a:srgbClr val="06B6D4"/>
                 </a:solidFill>
-                <a:latin typeface="Consolas"/>
+                <a:latin typeface="Consolas" panose="020B0609020204030204"/>
               </a:rPr>
               <a:t>213</a:t>
             </a:r>
+            <a:endParaRPr sz="2800" b="1">
+              <a:solidFill>
+                <a:srgbClr val="06B6D4"/>
+              </a:solidFill>
+              <a:latin typeface="Consolas" panose="020B0609020204030204"/>
+            </a:endParaRPr>
           </a:p>
         </p:txBody>
       </p:sp>
@@ -3574,10 +3595,16 @@
                 <a:solidFill>
                   <a:srgbClr val="64748B"/>
                 </a:solidFill>
-                <a:latin typeface="微软雅黑"/>
+                <a:latin typeface="微软雅黑" panose="020B0503020204020204" charset="-122"/>
               </a:rPr>
               <a:t>知识点</a:t>
             </a:r>
+            <a:endParaRPr sz="1200" b="0">
+              <a:solidFill>
+                <a:srgbClr val="64748B"/>
+              </a:solidFill>
+              <a:latin typeface="微软雅黑" panose="020B0503020204020204" charset="-122"/>
+            </a:endParaRPr>
           </a:p>
         </p:txBody>
       </p:sp>
@@ -3613,10 +3640,16 @@
                 <a:solidFill>
                   <a:srgbClr val="06B6D4"/>
                 </a:solidFill>
-                <a:latin typeface="Consolas"/>
+                <a:latin typeface="Consolas" panose="020B0609020204030204"/>
               </a:rPr>
               <a:t>229</a:t>
             </a:r>
+            <a:endParaRPr sz="2800" b="1">
+              <a:solidFill>
+                <a:srgbClr val="06B6D4"/>
+              </a:solidFill>
+              <a:latin typeface="Consolas" panose="020B0609020204030204"/>
+            </a:endParaRPr>
           </a:p>
         </p:txBody>
       </p:sp>
@@ -3652,10 +3685,16 @@
                 <a:solidFill>
                   <a:srgbClr val="64748B"/>
                 </a:solidFill>
-                <a:latin typeface="微软雅黑"/>
+                <a:latin typeface="微软雅黑" panose="020B0503020204020204" charset="-122"/>
               </a:rPr>
               <a:t>依赖边</a:t>
             </a:r>
+            <a:endParaRPr sz="1200" b="0">
+              <a:solidFill>
+                <a:srgbClr val="64748B"/>
+              </a:solidFill>
+              <a:latin typeface="微软雅黑" panose="020B0503020204020204" charset="-122"/>
+            </a:endParaRPr>
           </a:p>
         </p:txBody>
       </p:sp>
@@ -3691,10 +3730,16 @@
                 <a:solidFill>
                   <a:srgbClr val="06B6D4"/>
                 </a:solidFill>
-                <a:latin typeface="Consolas"/>
+                <a:latin typeface="Consolas" panose="020B0609020204030204"/>
               </a:rPr>
               <a:t>0</a:t>
             </a:r>
+            <a:endParaRPr sz="2800" b="1">
+              <a:solidFill>
+                <a:srgbClr val="06B6D4"/>
+              </a:solidFill>
+              <a:latin typeface="Consolas" panose="020B0609020204030204"/>
+            </a:endParaRPr>
           </a:p>
         </p:txBody>
       </p:sp>
@@ -3730,10 +3775,16 @@
                 <a:solidFill>
                   <a:srgbClr val="64748B"/>
                 </a:solidFill>
-                <a:latin typeface="微软雅黑"/>
+                <a:latin typeface="微软雅黑" panose="020B0503020204020204" charset="-122"/>
               </a:rPr>
               <a:t>环数</a:t>
             </a:r>
+            <a:endParaRPr sz="1200" b="0">
+              <a:solidFill>
+                <a:srgbClr val="64748B"/>
+              </a:solidFill>
+              <a:latin typeface="微软雅黑" panose="020B0503020204020204" charset="-122"/>
+            </a:endParaRPr>
           </a:p>
         </p:txBody>
       </p:sp>
@@ -3769,10 +3820,16 @@
                 <a:solidFill>
                   <a:srgbClr val="64748B"/>
                 </a:solidFill>
-                <a:latin typeface="微软雅黑"/>
+                <a:latin typeface="微软雅黑" panose="020B0503020204020204" charset="-122"/>
               </a:rPr>
               <a:t>豆包战队 · 深圳大学计算机与软件学院 · 人工智能专业</a:t>
             </a:r>
+            <a:endParaRPr sz="1300" b="0">
+              <a:solidFill>
+                <a:srgbClr val="64748B"/>
+              </a:solidFill>
+              <a:latin typeface="微软雅黑" panose="020B0503020204020204" charset="-122"/>
+            </a:endParaRPr>
           </a:p>
         </p:txBody>
       </p:sp>
@@ -3785,7 +3842,7 @@
 </file>
 
 <file path=ppt/slides/slide10.xml><?xml version="1.0" encoding="utf-8"?>
-<p:sld xmlns:a="http://schemas.openxmlformats.org/drawingml/2006/main" xmlns:p="http://schemas.openxmlformats.org/presentationml/2006/main" xmlns:r="http://schemas.openxmlformats.org/officeDocument/2006/relationships">
+<p:sld xmlns:a="http://schemas.openxmlformats.org/drawingml/2006/main" xmlns:r="http://schemas.openxmlformats.org/officeDocument/2006/relationships" xmlns:p="http://schemas.openxmlformats.org/presentationml/2006/main">
   <p:cSld>
     <p:spTree>
       <p:nvGrpSpPr>
@@ -3826,10 +3883,16 @@
                 <a:solidFill>
                   <a:srgbClr val="06B6D4"/>
                 </a:solidFill>
-                <a:latin typeface="微软雅黑"/>
+                <a:latin typeface="微软雅黑" panose="020B0503020204020204" charset="-122"/>
               </a:rPr>
               <a:t>09 · AI 工具使用</a:t>
             </a:r>
+            <a:endParaRPr sz="1100" b="1">
+              <a:solidFill>
+                <a:srgbClr val="06B6D4"/>
+              </a:solidFill>
+              <a:latin typeface="微软雅黑" panose="020B0503020204020204" charset="-122"/>
+            </a:endParaRPr>
           </a:p>
         </p:txBody>
       </p:sp>
@@ -3865,10 +3928,16 @@
                 <a:solidFill>
                   <a:srgbClr val="0F172A"/>
                 </a:solidFill>
-                <a:latin typeface="微软雅黑"/>
+                <a:latin typeface="微软雅黑" panose="020B0503020204020204" charset="-122"/>
               </a:rPr>
               <a:t>用了多少 · 以及刻意不用的地方</a:t>
             </a:r>
+            <a:endParaRPr sz="2900" b="1">
+              <a:solidFill>
+                <a:srgbClr val="0F172A"/>
+              </a:solidFill>
+              <a:latin typeface="微软雅黑" panose="020B0503020204020204" charset="-122"/>
+            </a:endParaRPr>
           </a:p>
         </p:txBody>
       </p:sp>
@@ -3948,10 +4017,16 @@
                 <a:solidFill>
                   <a:srgbClr val="3B82F6"/>
                 </a:solidFill>
-                <a:latin typeface="Consolas"/>
+                <a:latin typeface="Consolas" panose="020B0609020204030204"/>
               </a:rPr>
               <a:t>241 轮对话</a:t>
             </a:r>
+            <a:endParaRPr sz="3000" b="1">
+              <a:solidFill>
+                <a:srgbClr val="3B82F6"/>
+              </a:solidFill>
+              <a:latin typeface="Consolas" panose="020B0609020204030204"/>
+            </a:endParaRPr>
           </a:p>
         </p:txBody>
       </p:sp>
@@ -3987,10 +4062,16 @@
                 <a:solidFill>
                   <a:srgbClr val="64748B"/>
                 </a:solidFill>
-                <a:latin typeface="微软雅黑"/>
+                <a:latin typeface="微软雅黑" panose="020B0503020204020204" charset="-122"/>
               </a:rPr>
               <a:t>14 天 · 完整逐字记录随作品提交</a:t>
             </a:r>
+            <a:endParaRPr sz="1300" b="0">
+              <a:solidFill>
+                <a:srgbClr val="64748B"/>
+              </a:solidFill>
+              <a:latin typeface="微软雅黑" panose="020B0503020204020204" charset="-122"/>
+            </a:endParaRPr>
           </a:p>
         </p:txBody>
       </p:sp>
@@ -4070,10 +4151,16 @@
                 <a:solidFill>
                   <a:srgbClr val="06B6D4"/>
                 </a:solidFill>
-                <a:latin typeface="Consolas"/>
+                <a:latin typeface="Consolas" panose="020B0609020204030204"/>
               </a:rPr>
               <a:t>0 次调用</a:t>
             </a:r>
+            <a:endParaRPr sz="3000" b="1">
+              <a:solidFill>
+                <a:srgbClr val="06B6D4"/>
+              </a:solidFill>
+              <a:latin typeface="Consolas" panose="020B0609020204030204"/>
+            </a:endParaRPr>
           </a:p>
         </p:txBody>
       </p:sp>
@@ -4109,10 +4196,16 @@
                 <a:solidFill>
                   <a:srgbClr val="64748B"/>
                 </a:solidFill>
-                <a:latin typeface="微软雅黑"/>
+                <a:latin typeface="微软雅黑" panose="020B0503020204020204" charset="-122"/>
               </a:rPr>
               <a:t>三个核心算法：依赖图校验 / 学习路径 / 卡点回溯</a:t>
             </a:r>
+            <a:endParaRPr sz="1300" b="0">
+              <a:solidFill>
+                <a:srgbClr val="64748B"/>
+              </a:solidFill>
+              <a:latin typeface="微软雅黑" panose="020B0503020204020204" charset="-122"/>
+            </a:endParaRPr>
           </a:p>
         </p:txBody>
       </p:sp>
@@ -4192,10 +4285,16 @@
                 <a:solidFill>
                   <a:srgbClr val="FFFFFF"/>
                 </a:solidFill>
-                <a:latin typeface="微软雅黑"/>
+                <a:latin typeface="微软雅黑" panose="020B0503020204020204" charset="-122"/>
               </a:rPr>
               <a:t>⭐ 刻意不用 AI 的地方：代码注释原话「不调用任何模型」</a:t>
             </a:r>
+            <a:endParaRPr sz="1700" b="1">
+              <a:solidFill>
+                <a:srgbClr val="FFFFFF"/>
+              </a:solidFill>
+              <a:latin typeface="微软雅黑" panose="020B0503020204020204" charset="-122"/>
+            </a:endParaRPr>
           </a:p>
         </p:txBody>
       </p:sp>
@@ -4208,7 +4307,7 @@
         <p:spPr>
           <a:xfrm>
             <a:off x="758952" y="4389120"/>
-            <a:ext cx="10698480" cy="1463040"/>
+            <a:ext cx="10698480" cy="1814195"/>
           </a:xfrm>
           <a:prstGeom prst="rect">
             <a:avLst/>
@@ -4231,10 +4330,16 @@
                 <a:solidFill>
                   <a:srgbClr val="64748B"/>
                 </a:solidFill>
-                <a:latin typeface="微软雅黑"/>
+                <a:latin typeface="微软雅黑" panose="020B0503020204020204" charset="-122"/>
               </a:rPr>
               <a:t>这是 SPEC §4.8「LLM 移出关键路径」的具体落地 ——</a:t>
             </a:r>
+            <a:endParaRPr sz="1300" b="0">
+              <a:solidFill>
+                <a:srgbClr val="64748B"/>
+              </a:solidFill>
+              <a:latin typeface="微软雅黑" panose="020B0503020204020204" charset="-122"/>
+            </a:endParaRPr>
           </a:p>
           <a:p>
             <a:pPr algn="l">
@@ -4247,10 +4352,16 @@
                 <a:solidFill>
                   <a:srgbClr val="64748B"/>
                 </a:solidFill>
-                <a:latin typeface="微软雅黑"/>
-              </a:rPr>
-              <a:t>解析与抽取交给模型（粗活，允许不确定性）；而**依赖图校验 / 学习路径排序 / 卡点回溯**这三件事</a:t>
-            </a:r>
+                <a:latin typeface="微软雅黑" panose="020B0503020204020204" charset="-122"/>
+              </a:rPr>
+              <a:t>解析与抽取交给模型（粗活，允许不确定性）；而依赖图校验 / 学习路径排序 / 卡点回溯这三件事</a:t>
+            </a:r>
+            <a:endParaRPr sz="1300" b="0">
+              <a:solidFill>
+                <a:srgbClr val="64748B"/>
+              </a:solidFill>
+              <a:latin typeface="微软雅黑" panose="020B0503020204020204" charset="-122"/>
+            </a:endParaRPr>
           </a:p>
           <a:p>
             <a:pPr algn="l">
@@ -4263,10 +4374,16 @@
                 <a:solidFill>
                   <a:srgbClr val="64748B"/>
                 </a:solidFill>
-                <a:latin typeface="微软雅黑"/>
-              </a:rPr>
-              <a:t>是评委要验的「教学逻辑」，**必须可复现、可离线、可当场跑**。</a:t>
-            </a:r>
+                <a:latin typeface="微软雅黑" panose="020B0503020204020204" charset="-122"/>
+              </a:rPr>
+              <a:t>是评委要验的「教学逻辑」，必须可复现、可离线、可当场跑。</a:t>
+            </a:r>
+            <a:endParaRPr sz="1300" b="0">
+              <a:solidFill>
+                <a:srgbClr val="64748B"/>
+              </a:solidFill>
+              <a:latin typeface="微软雅黑" panose="020B0503020204020204" charset="-122"/>
+            </a:endParaRPr>
           </a:p>
           <a:p>
             <a:pPr algn="l">
@@ -4274,31 +4391,28 @@
                 <a:spcPct val="160000"/>
               </a:lnSpc>
             </a:pPr>
+          </a:p>
+          <a:p>
+            <a:pPr algn="l">
+              <a:lnSpc>
+                <a:spcPct val="160000"/>
+              </a:lnSpc>
+            </a:pPr>
             <a:r>
               <a:rPr sz="1300" b="0">
                 <a:solidFill>
                   <a:srgbClr val="64748B"/>
                 </a:solidFill>
-                <a:latin typeface="微软雅黑"/>
-              </a:rPr>
-              <a:t/>
-            </a:r>
-          </a:p>
-          <a:p>
-            <a:pPr algn="l">
-              <a:lnSpc>
-                <a:spcPct val="160000"/>
-              </a:lnSpc>
-            </a:pPr>
-            <a:r>
-              <a:rPr sz="1300" b="0">
-                <a:solidFill>
-                  <a:srgbClr val="64748B"/>
-                </a:solidFill>
-                <a:latin typeface="微软雅黑"/>
-              </a:rPr>
-              <a:t>⇒ 核心原则：**AI 干粗活 + 人做裁决**（我们不说「全自动抽取」）。</a:t>
-            </a:r>
+                <a:latin typeface="微软雅黑" panose="020B0503020204020204" charset="-122"/>
+              </a:rPr>
+              <a:t>⇒ 核心原则：AI 干粗活 + 人做裁决（我们不说「全自动抽取」）。</a:t>
+            </a:r>
+            <a:endParaRPr sz="1300" b="0">
+              <a:solidFill>
+                <a:srgbClr val="64748B"/>
+              </a:solidFill>
+              <a:latin typeface="微软雅黑" panose="020B0503020204020204" charset="-122"/>
+            </a:endParaRPr>
           </a:p>
         </p:txBody>
       </p:sp>
@@ -4378,10 +4492,16 @@
                 <a:solidFill>
                   <a:srgbClr val="64748B"/>
                 </a:solidFill>
-                <a:latin typeface="微软雅黑"/>
+                <a:latin typeface="微软雅黑" panose="020B0503020204020204" charset="-122"/>
               </a:rPr>
               <a:t>析知 XiZhi · 多模态教学智能体</a:t>
             </a:r>
+            <a:endParaRPr sz="1200" b="0">
+              <a:solidFill>
+                <a:srgbClr val="64748B"/>
+              </a:solidFill>
+              <a:latin typeface="微软雅黑" panose="020B0503020204020204" charset="-122"/>
+            </a:endParaRPr>
           </a:p>
         </p:txBody>
       </p:sp>
@@ -4417,10 +4537,16 @@
                 <a:solidFill>
                   <a:srgbClr val="64748B"/>
                 </a:solidFill>
-                <a:latin typeface="微软雅黑"/>
+                <a:latin typeface="微软雅黑" panose="020B0503020204020204" charset="-122"/>
               </a:rPr>
               <a:t>10 / 11</a:t>
             </a:r>
+            <a:endParaRPr sz="1200" b="0">
+              <a:solidFill>
+                <a:srgbClr val="64748B"/>
+              </a:solidFill>
+              <a:latin typeface="微软雅黑" panose="020B0503020204020204" charset="-122"/>
+            </a:endParaRPr>
           </a:p>
         </p:txBody>
       </p:sp>
@@ -4433,7 +4559,7 @@
 </file>
 
 <file path=ppt/slides/slide11.xml><?xml version="1.0" encoding="utf-8"?>
-<p:sld xmlns:a="http://schemas.openxmlformats.org/drawingml/2006/main" xmlns:p="http://schemas.openxmlformats.org/presentationml/2006/main" xmlns:r="http://schemas.openxmlformats.org/officeDocument/2006/relationships">
+<p:sld xmlns:a="http://schemas.openxmlformats.org/drawingml/2006/main" xmlns:r="http://schemas.openxmlformats.org/officeDocument/2006/relationships" xmlns:p="http://schemas.openxmlformats.org/presentationml/2006/main">
   <p:cSld>
     <p:spTree>
       <p:nvGrpSpPr>
@@ -4474,10 +4600,16 @@
                 <a:solidFill>
                   <a:srgbClr val="06B6D4"/>
                 </a:solidFill>
-                <a:latin typeface="微软雅黑"/>
+                <a:latin typeface="微软雅黑" panose="020B0503020204020204" charset="-122"/>
               </a:rPr>
               <a:t>10 · 团队成员信息</a:t>
             </a:r>
+            <a:endParaRPr sz="1100" b="1">
+              <a:solidFill>
+                <a:srgbClr val="06B6D4"/>
+              </a:solidFill>
+              <a:latin typeface="微软雅黑" panose="020B0503020204020204" charset="-122"/>
+            </a:endParaRPr>
           </a:p>
         </p:txBody>
       </p:sp>
@@ -4513,10 +4645,16 @@
                 <a:solidFill>
                   <a:srgbClr val="0F172A"/>
                 </a:solidFill>
-                <a:latin typeface="微软雅黑"/>
+                <a:latin typeface="微软雅黑" panose="020B0503020204020204" charset="-122"/>
               </a:rPr>
               <a:t>三人分工</a:t>
             </a:r>
+            <a:endParaRPr sz="2900" b="1">
+              <a:solidFill>
+                <a:srgbClr val="0F172A"/>
+              </a:solidFill>
+              <a:latin typeface="微软雅黑" panose="020B0503020204020204" charset="-122"/>
+            </a:endParaRPr>
           </a:p>
         </p:txBody>
       </p:sp>
@@ -4524,7 +4662,11 @@
         <p:nvSpPr>
           <p:cNvPr id="4" name="Rectangle 3"/>
           <p:cNvSpPr/>
-          <p:nvPr/>
+          <p:nvPr>
+            <p:custDataLst>
+              <p:tags r:id="rId1"/>
+            </p:custDataLst>
+          </p:nvPr>
         </p:nvSpPr>
         <p:spPr>
           <a:xfrm>
@@ -4568,7 +4710,11 @@
         <p:nvSpPr>
           <p:cNvPr id="5" name="Rectangle 4"/>
           <p:cNvSpPr/>
-          <p:nvPr/>
+          <p:nvPr>
+            <p:custDataLst>
+              <p:tags r:id="rId2"/>
+            </p:custDataLst>
+          </p:nvPr>
         </p:nvSpPr>
         <p:spPr>
           <a:xfrm>
@@ -4612,7 +4758,11 @@
         <p:nvSpPr>
           <p:cNvPr id="6" name="TextBox 5"/>
           <p:cNvSpPr txBox="1"/>
-          <p:nvPr/>
+          <p:nvPr>
+            <p:custDataLst>
+              <p:tags r:id="rId3"/>
+            </p:custDataLst>
+          </p:nvPr>
         </p:nvSpPr>
         <p:spPr>
           <a:xfrm>
@@ -4640,10 +4790,16 @@
                 <a:solidFill>
                   <a:srgbClr val="3B82F6"/>
                 </a:solidFill>
-                <a:latin typeface="Consolas"/>
+                <a:latin typeface="Consolas" panose="020B0609020204030204"/>
               </a:rPr>
               <a:t>P1</a:t>
             </a:r>
+            <a:endParaRPr sz="2400" b="1">
+              <a:solidFill>
+                <a:srgbClr val="3B82F6"/>
+              </a:solidFill>
+              <a:latin typeface="Consolas" panose="020B0609020204030204"/>
+            </a:endParaRPr>
           </a:p>
         </p:txBody>
       </p:sp>
@@ -4651,7 +4807,11 @@
         <p:nvSpPr>
           <p:cNvPr id="7" name="TextBox 6"/>
           <p:cNvSpPr txBox="1"/>
-          <p:nvPr/>
+          <p:nvPr>
+            <p:custDataLst>
+              <p:tags r:id="rId4"/>
+            </p:custDataLst>
+          </p:nvPr>
         </p:nvSpPr>
         <p:spPr>
           <a:xfrm>
@@ -4679,10 +4839,16 @@
                 <a:solidFill>
                   <a:srgbClr val="0F172A"/>
                 </a:solidFill>
-                <a:latin typeface="微软雅黑"/>
+                <a:latin typeface="微软雅黑" panose="020B0503020204020204" charset="-122"/>
               </a:rPr>
               <a:t>解析工程</a:t>
             </a:r>
+            <a:endParaRPr sz="1700" b="1">
+              <a:solidFill>
+                <a:srgbClr val="0F172A"/>
+              </a:solidFill>
+              <a:latin typeface="微软雅黑" panose="020B0503020204020204" charset="-122"/>
+            </a:endParaRPr>
           </a:p>
         </p:txBody>
       </p:sp>
@@ -4690,12 +4856,16 @@
         <p:nvSpPr>
           <p:cNvPr id="8" name="TextBox 7"/>
           <p:cNvSpPr txBox="1"/>
-          <p:nvPr/>
+          <p:nvPr>
+            <p:custDataLst>
+              <p:tags r:id="rId5"/>
+            </p:custDataLst>
+          </p:nvPr>
         </p:nvSpPr>
         <p:spPr>
           <a:xfrm>
             <a:off x="2103120" y="2258568"/>
-            <a:ext cx="2743200" cy="365760"/>
+            <a:ext cx="2743200" cy="370840"/>
           </a:xfrm>
           <a:prstGeom prst="rect">
             <a:avLst/>
@@ -4714,14 +4884,20 @@
               </a:lnSpc>
             </a:pPr>
             <a:r>
-              <a:rPr sz="1300" b="0">
+              <a:rPr lang="zh-CN" sz="1300" b="0">
                 <a:solidFill>
                   <a:srgbClr val="64748B"/>
                 </a:solidFill>
-                <a:latin typeface="Consolas"/>
-              </a:rPr>
-              <a:t>GitHub  DakerDack</a:t>
-            </a:r>
+                <a:latin typeface="Consolas" panose="020B0609020204030204"/>
+              </a:rPr>
+              <a:t>李坦达</a:t>
+            </a:r>
+            <a:endParaRPr lang="zh-CN" sz="1300" b="0">
+              <a:solidFill>
+                <a:srgbClr val="64748B"/>
+              </a:solidFill>
+              <a:latin typeface="Consolas" panose="020B0609020204030204"/>
+            </a:endParaRPr>
           </a:p>
         </p:txBody>
       </p:sp>
@@ -4729,7 +4905,11 @@
         <p:nvSpPr>
           <p:cNvPr id="9" name="TextBox 8"/>
           <p:cNvSpPr txBox="1"/>
-          <p:nvPr/>
+          <p:nvPr>
+            <p:custDataLst>
+              <p:tags r:id="rId6"/>
+            </p:custDataLst>
+          </p:nvPr>
         </p:nvSpPr>
         <p:spPr>
           <a:xfrm>
@@ -4757,10 +4937,16 @@
                 <a:solidFill>
                   <a:srgbClr val="334155"/>
                 </a:solidFill>
-                <a:latin typeface="微软雅黑"/>
+                <a:latin typeface="微软雅黑" panose="020B0503020204020204" charset="-122"/>
               </a:rPr>
               <a:t>材料解析 / 知识点抽取 / 依赖边候选 / 海报</a:t>
             </a:r>
+            <a:endParaRPr sz="1300" b="0">
+              <a:solidFill>
+                <a:srgbClr val="334155"/>
+              </a:solidFill>
+              <a:latin typeface="微软雅黑" panose="020B0503020204020204" charset="-122"/>
+            </a:endParaRPr>
           </a:p>
         </p:txBody>
       </p:sp>
@@ -4768,7 +4954,11 @@
         <p:nvSpPr>
           <p:cNvPr id="10" name="Rectangle 9"/>
           <p:cNvSpPr/>
-          <p:nvPr/>
+          <p:nvPr>
+            <p:custDataLst>
+              <p:tags r:id="rId7"/>
+            </p:custDataLst>
+          </p:nvPr>
         </p:nvSpPr>
         <p:spPr>
           <a:xfrm>
@@ -4812,7 +5002,11 @@
         <p:nvSpPr>
           <p:cNvPr id="11" name="Rectangle 10"/>
           <p:cNvSpPr/>
-          <p:nvPr/>
+          <p:nvPr>
+            <p:custDataLst>
+              <p:tags r:id="rId8"/>
+            </p:custDataLst>
+          </p:nvPr>
         </p:nvSpPr>
         <p:spPr>
           <a:xfrm>
@@ -4856,7 +5050,11 @@
         <p:nvSpPr>
           <p:cNvPr id="12" name="TextBox 11"/>
           <p:cNvSpPr txBox="1"/>
-          <p:nvPr/>
+          <p:nvPr>
+            <p:custDataLst>
+              <p:tags r:id="rId9"/>
+            </p:custDataLst>
+          </p:nvPr>
         </p:nvSpPr>
         <p:spPr>
           <a:xfrm>
@@ -4884,10 +5082,16 @@
                 <a:solidFill>
                   <a:srgbClr val="3B82F6"/>
                 </a:solidFill>
-                <a:latin typeface="Consolas"/>
+                <a:latin typeface="Consolas" panose="020B0609020204030204"/>
               </a:rPr>
               <a:t>P2</a:t>
             </a:r>
+            <a:endParaRPr sz="2400" b="1">
+              <a:solidFill>
+                <a:srgbClr val="3B82F6"/>
+              </a:solidFill>
+              <a:latin typeface="Consolas" panose="020B0609020204030204"/>
+            </a:endParaRPr>
           </a:p>
         </p:txBody>
       </p:sp>
@@ -4895,7 +5099,11 @@
         <p:nvSpPr>
           <p:cNvPr id="13" name="TextBox 12"/>
           <p:cNvSpPr txBox="1"/>
-          <p:nvPr/>
+          <p:nvPr>
+            <p:custDataLst>
+              <p:tags r:id="rId10"/>
+            </p:custDataLst>
+          </p:nvPr>
         </p:nvSpPr>
         <p:spPr>
           <a:xfrm>
@@ -4923,10 +5131,16 @@
                 <a:solidFill>
                   <a:srgbClr val="0F172A"/>
                 </a:solidFill>
-                <a:latin typeface="微软雅黑"/>
+                <a:latin typeface="微软雅黑" panose="020B0503020204020204" charset="-122"/>
               </a:rPr>
               <a:t>数据与结构化</a:t>
             </a:r>
+            <a:endParaRPr sz="1700" b="1">
+              <a:solidFill>
+                <a:srgbClr val="0F172A"/>
+              </a:solidFill>
+              <a:latin typeface="微软雅黑" panose="020B0503020204020204" charset="-122"/>
+            </a:endParaRPr>
           </a:p>
         </p:txBody>
       </p:sp>
@@ -4934,12 +5148,16 @@
         <p:nvSpPr>
           <p:cNvPr id="14" name="TextBox 13"/>
           <p:cNvSpPr txBox="1"/>
-          <p:nvPr/>
+          <p:nvPr>
+            <p:custDataLst>
+              <p:tags r:id="rId11"/>
+            </p:custDataLst>
+          </p:nvPr>
         </p:nvSpPr>
         <p:spPr>
           <a:xfrm>
             <a:off x="2103120" y="3447288"/>
-            <a:ext cx="2743200" cy="365760"/>
+            <a:ext cx="2743200" cy="370840"/>
           </a:xfrm>
           <a:prstGeom prst="rect">
             <a:avLst/>
@@ -4958,14 +5176,20 @@
               </a:lnSpc>
             </a:pPr>
             <a:r>
-              <a:rPr sz="1300" b="0">
+              <a:rPr lang="zh-CN" sz="1300" b="0">
                 <a:solidFill>
                   <a:srgbClr val="64748B"/>
                 </a:solidFill>
-                <a:latin typeface="Consolas"/>
-              </a:rPr>
-              <a:t>GitHub  Mikeys5s</a:t>
-            </a:r>
+                <a:latin typeface="Consolas" panose="020B0609020204030204"/>
+              </a:rPr>
+              <a:t>吕浩宏</a:t>
+            </a:r>
+            <a:endParaRPr lang="zh-CN" sz="1300" b="0">
+              <a:solidFill>
+                <a:srgbClr val="64748B"/>
+              </a:solidFill>
+              <a:latin typeface="Consolas" panose="020B0609020204030204"/>
+            </a:endParaRPr>
           </a:p>
         </p:txBody>
       </p:sp>
@@ -4973,7 +5197,11 @@
         <p:nvSpPr>
           <p:cNvPr id="15" name="TextBox 14"/>
           <p:cNvSpPr txBox="1"/>
-          <p:nvPr/>
+          <p:nvPr>
+            <p:custDataLst>
+              <p:tags r:id="rId12"/>
+            </p:custDataLst>
+          </p:nvPr>
         </p:nvSpPr>
         <p:spPr>
           <a:xfrm>
@@ -5001,10 +5229,16 @@
                 <a:solidFill>
                   <a:srgbClr val="334155"/>
                 </a:solidFill>
-                <a:latin typeface="微软雅黑"/>
+                <a:latin typeface="微软雅黑" panose="020B0503020204020204" charset="-122"/>
               </a:rPr>
               <a:t>知识图谱 / 检索 / 校验体系 / 本 PPT</a:t>
             </a:r>
+            <a:endParaRPr sz="1300" b="0">
+              <a:solidFill>
+                <a:srgbClr val="334155"/>
+              </a:solidFill>
+              <a:latin typeface="微软雅黑" panose="020B0503020204020204" charset="-122"/>
+            </a:endParaRPr>
           </a:p>
         </p:txBody>
       </p:sp>
@@ -5012,7 +5246,11 @@
         <p:nvSpPr>
           <p:cNvPr id="16" name="Rectangle 15"/>
           <p:cNvSpPr/>
-          <p:nvPr/>
+          <p:nvPr>
+            <p:custDataLst>
+              <p:tags r:id="rId13"/>
+            </p:custDataLst>
+          </p:nvPr>
         </p:nvSpPr>
         <p:spPr>
           <a:xfrm>
@@ -5056,7 +5294,11 @@
         <p:nvSpPr>
           <p:cNvPr id="17" name="Rectangle 16"/>
           <p:cNvSpPr/>
-          <p:nvPr/>
+          <p:nvPr>
+            <p:custDataLst>
+              <p:tags r:id="rId14"/>
+            </p:custDataLst>
+          </p:nvPr>
         </p:nvSpPr>
         <p:spPr>
           <a:xfrm>
@@ -5100,7 +5342,11 @@
         <p:nvSpPr>
           <p:cNvPr id="18" name="TextBox 17"/>
           <p:cNvSpPr txBox="1"/>
-          <p:nvPr/>
+          <p:nvPr>
+            <p:custDataLst>
+              <p:tags r:id="rId15"/>
+            </p:custDataLst>
+          </p:nvPr>
         </p:nvSpPr>
         <p:spPr>
           <a:xfrm>
@@ -5128,10 +5374,16 @@
                 <a:solidFill>
                   <a:srgbClr val="3B82F6"/>
                 </a:solidFill>
-                <a:latin typeface="Consolas"/>
+                <a:latin typeface="Consolas" panose="020B0609020204030204"/>
               </a:rPr>
               <a:t>P3</a:t>
             </a:r>
+            <a:endParaRPr sz="2400" b="1">
+              <a:solidFill>
+                <a:srgbClr val="3B82F6"/>
+              </a:solidFill>
+              <a:latin typeface="Consolas" panose="020B0609020204030204"/>
+            </a:endParaRPr>
           </a:p>
         </p:txBody>
       </p:sp>
@@ -5139,7 +5391,11 @@
         <p:nvSpPr>
           <p:cNvPr id="19" name="TextBox 18"/>
           <p:cNvSpPr txBox="1"/>
-          <p:nvPr/>
+          <p:nvPr>
+            <p:custDataLst>
+              <p:tags r:id="rId16"/>
+            </p:custDataLst>
+          </p:nvPr>
         </p:nvSpPr>
         <p:spPr>
           <a:xfrm>
@@ -5167,10 +5423,16 @@
                 <a:solidFill>
                   <a:srgbClr val="0F172A"/>
                 </a:solidFill>
-                <a:latin typeface="微软雅黑"/>
+                <a:latin typeface="微软雅黑" panose="020B0503020204020204" charset="-122"/>
               </a:rPr>
               <a:t>前端与交互</a:t>
             </a:r>
+            <a:endParaRPr sz="1700" b="1">
+              <a:solidFill>
+                <a:srgbClr val="0F172A"/>
+              </a:solidFill>
+              <a:latin typeface="微软雅黑" panose="020B0503020204020204" charset="-122"/>
+            </a:endParaRPr>
           </a:p>
         </p:txBody>
       </p:sp>
@@ -5178,12 +5440,16 @@
         <p:nvSpPr>
           <p:cNvPr id="20" name="TextBox 19"/>
           <p:cNvSpPr txBox="1"/>
-          <p:nvPr/>
+          <p:nvPr>
+            <p:custDataLst>
+              <p:tags r:id="rId17"/>
+            </p:custDataLst>
+          </p:nvPr>
         </p:nvSpPr>
         <p:spPr>
           <a:xfrm>
             <a:off x="2103120" y="4636008"/>
-            <a:ext cx="2743200" cy="365760"/>
+            <a:ext cx="2743200" cy="370840"/>
           </a:xfrm>
           <a:prstGeom prst="rect">
             <a:avLst/>
@@ -5202,14 +5468,20 @@
               </a:lnSpc>
             </a:pPr>
             <a:r>
-              <a:rPr sz="1300" b="0">
+              <a:rPr lang="zh-CN" sz="1300" b="0">
                 <a:solidFill>
                   <a:srgbClr val="64748B"/>
                 </a:solidFill>
-                <a:latin typeface="Consolas"/>
-              </a:rPr>
-              <a:t>GitHub  RyeYen</a:t>
-            </a:r>
+                <a:latin typeface="Consolas" panose="020B0609020204030204"/>
+              </a:rPr>
+              <a:t>甄文校</a:t>
+            </a:r>
+            <a:endParaRPr lang="zh-CN" sz="1300" b="0">
+              <a:solidFill>
+                <a:srgbClr val="64748B"/>
+              </a:solidFill>
+              <a:latin typeface="Consolas" panose="020B0609020204030204"/>
+            </a:endParaRPr>
           </a:p>
         </p:txBody>
       </p:sp>
@@ -5217,7 +5489,11 @@
         <p:nvSpPr>
           <p:cNvPr id="21" name="TextBox 20"/>
           <p:cNvSpPr txBox="1"/>
-          <p:nvPr/>
+          <p:nvPr>
+            <p:custDataLst>
+              <p:tags r:id="rId18"/>
+            </p:custDataLst>
+          </p:nvPr>
         </p:nvSpPr>
         <p:spPr>
           <a:xfrm>
@@ -5245,10 +5521,16 @@
                 <a:solidFill>
                   <a:srgbClr val="334155"/>
                 </a:solidFill>
-                <a:latin typeface="微软雅黑"/>
+                <a:latin typeface="微软雅黑" panose="020B0503020204020204" charset="-122"/>
               </a:rPr>
               <a:t>界面 / 图谱可视化 / 交互 / 演示</a:t>
             </a:r>
+            <a:endParaRPr sz="1300" b="0">
+              <a:solidFill>
+                <a:srgbClr val="334155"/>
+              </a:solidFill>
+              <a:latin typeface="微软雅黑" panose="020B0503020204020204" charset="-122"/>
+            </a:endParaRPr>
           </a:p>
         </p:txBody>
       </p:sp>
@@ -5284,10 +5566,16 @@
                 <a:solidFill>
                   <a:srgbClr val="64748B"/>
                 </a:solidFill>
-                <a:latin typeface="微软雅黑"/>
+                <a:latin typeface="微软雅黑" panose="020B0503020204020204" charset="-122"/>
               </a:rPr>
               <a:t>三人同属深圳大学计算机与软件学院 · 人工智能专业</a:t>
             </a:r>
+            <a:endParaRPr sz="1200" b="0">
+              <a:solidFill>
+                <a:srgbClr val="64748B"/>
+              </a:solidFill>
+              <a:latin typeface="微软雅黑" panose="020B0503020204020204" charset="-122"/>
+            </a:endParaRPr>
           </a:p>
           <a:p>
             <a:pPr algn="l">
@@ -5300,10 +5588,16 @@
                 <a:solidFill>
                   <a:srgbClr val="64748B"/>
                 </a:solidFill>
-                <a:latin typeface="微软雅黑"/>
+                <a:latin typeface="微软雅黑" panose="020B0503020204020204" charset="-122"/>
               </a:rPr>
               <a:t>在线演示  http://120.77.177.171:8000　·　源码仓库  https://gitee.com/mikey_code/multimodal-teaching-agent</a:t>
             </a:r>
+            <a:endParaRPr sz="1200" b="0">
+              <a:solidFill>
+                <a:srgbClr val="64748B"/>
+              </a:solidFill>
+              <a:latin typeface="微软雅黑" panose="020B0503020204020204" charset="-122"/>
+            </a:endParaRPr>
           </a:p>
         </p:txBody>
       </p:sp>
@@ -5383,10 +5677,16 @@
                 <a:solidFill>
                   <a:srgbClr val="64748B"/>
                 </a:solidFill>
-                <a:latin typeface="微软雅黑"/>
+                <a:latin typeface="微软雅黑" panose="020B0503020204020204" charset="-122"/>
               </a:rPr>
               <a:t>析知 XiZhi · 多模态教学智能体</a:t>
             </a:r>
+            <a:endParaRPr sz="1200" b="0">
+              <a:solidFill>
+                <a:srgbClr val="64748B"/>
+              </a:solidFill>
+              <a:latin typeface="微软雅黑" panose="020B0503020204020204" charset="-122"/>
+            </a:endParaRPr>
           </a:p>
         </p:txBody>
       </p:sp>
@@ -5422,10 +5722,16 @@
                 <a:solidFill>
                   <a:srgbClr val="64748B"/>
                 </a:solidFill>
-                <a:latin typeface="微软雅黑"/>
+                <a:latin typeface="微软雅黑" panose="020B0503020204020204" charset="-122"/>
               </a:rPr>
               <a:t>11 / 11</a:t>
             </a:r>
+            <a:endParaRPr sz="1200" b="0">
+              <a:solidFill>
+                <a:srgbClr val="64748B"/>
+              </a:solidFill>
+              <a:latin typeface="微软雅黑" panose="020B0503020204020204" charset="-122"/>
+            </a:endParaRPr>
           </a:p>
         </p:txBody>
       </p:sp>
@@ -5438,7 +5744,7 @@
 </file>
 
 <file path=ppt/slides/slide2.xml><?xml version="1.0" encoding="utf-8"?>
-<p:sld xmlns:a="http://schemas.openxmlformats.org/drawingml/2006/main" xmlns:p="http://schemas.openxmlformats.org/presentationml/2006/main" xmlns:r="http://schemas.openxmlformats.org/officeDocument/2006/relationships">
+<p:sld xmlns:a="http://schemas.openxmlformats.org/drawingml/2006/main" xmlns:r="http://schemas.openxmlformats.org/officeDocument/2006/relationships" xmlns:p="http://schemas.openxmlformats.org/presentationml/2006/main">
   <p:cSld>
     <p:spTree>
       <p:nvGrpSpPr>
@@ -5479,10 +5785,16 @@
                 <a:solidFill>
                   <a:srgbClr val="06B6D4"/>
                 </a:solidFill>
-                <a:latin typeface="微软雅黑"/>
+                <a:latin typeface="微软雅黑" panose="020B0503020204020204" charset="-122"/>
               </a:rPr>
               <a:t>01 · 作品简介</a:t>
             </a:r>
+            <a:endParaRPr sz="1100" b="1">
+              <a:solidFill>
+                <a:srgbClr val="06B6D4"/>
+              </a:solidFill>
+              <a:latin typeface="微软雅黑" panose="020B0503020204020204" charset="-122"/>
+            </a:endParaRPr>
           </a:p>
         </p:txBody>
       </p:sp>
@@ -5518,10 +5830,16 @@
                 <a:solidFill>
                   <a:srgbClr val="0F172A"/>
                 </a:solidFill>
-                <a:latin typeface="微软雅黑"/>
+                <a:latin typeface="微软雅黑" panose="020B0503020204020204" charset="-122"/>
               </a:rPr>
               <a:t>它解决的是学生的什么痛点</a:t>
             </a:r>
+            <a:endParaRPr sz="2900" b="1">
+              <a:solidFill>
+                <a:srgbClr val="0F172A"/>
+              </a:solidFill>
+              <a:latin typeface="微软雅黑" panose="020B0503020204020204" charset="-122"/>
+            </a:endParaRPr>
           </a:p>
         </p:txBody>
       </p:sp>
@@ -5601,10 +5919,16 @@
                 <a:solidFill>
                   <a:srgbClr val="334155"/>
                 </a:solidFill>
-                <a:latin typeface="微软雅黑"/>
+                <a:latin typeface="微软雅黑" panose="020B0503020204020204" charset="-122"/>
               </a:rPr>
               <a:t>痛点</a:t>
             </a:r>
+            <a:endParaRPr sz="1400" b="0">
+              <a:solidFill>
+                <a:srgbClr val="334155"/>
+              </a:solidFill>
+              <a:latin typeface="微软雅黑" panose="020B0503020204020204" charset="-122"/>
+            </a:endParaRPr>
           </a:p>
           <a:p>
             <a:pPr algn="l">
@@ -5617,10 +5941,16 @@
                 <a:solidFill>
                   <a:srgbClr val="334155"/>
                 </a:solidFill>
-                <a:latin typeface="微软雅黑"/>
+                <a:latin typeface="微软雅黑" panose="020B0503020204020204" charset="-122"/>
               </a:rPr>
               <a:t>老师发一份讲义、拍一张板书，学生看不懂、做题卡住</a:t>
             </a:r>
+            <a:endParaRPr sz="1400" b="0">
+              <a:solidFill>
+                <a:srgbClr val="334155"/>
+              </a:solidFill>
+              <a:latin typeface="微软雅黑" panose="020B0503020204020204" charset="-122"/>
+            </a:endParaRPr>
           </a:p>
           <a:p>
             <a:pPr algn="l">
@@ -5633,10 +5963,16 @@
                 <a:solidFill>
                   <a:srgbClr val="334155"/>
                 </a:solidFill>
-                <a:latin typeface="微软雅黑"/>
+                <a:latin typeface="微软雅黑" panose="020B0503020204020204" charset="-122"/>
               </a:rPr>
               <a:t>—— 而「卡在哪」往往说不清，只能从头再看一遍。</a:t>
             </a:r>
+            <a:endParaRPr sz="1400" b="0">
+              <a:solidFill>
+                <a:srgbClr val="334155"/>
+              </a:solidFill>
+              <a:latin typeface="微软雅黑" panose="020B0503020204020204" charset="-122"/>
+            </a:endParaRPr>
           </a:p>
         </p:txBody>
       </p:sp>
@@ -5716,10 +6052,16 @@
                 <a:solidFill>
                   <a:srgbClr val="1E3A8A"/>
                 </a:solidFill>
-                <a:latin typeface="微软雅黑"/>
+                <a:latin typeface="微软雅黑" panose="020B0503020204020204" charset="-122"/>
               </a:rPr>
               <a:t>析知做的</a:t>
             </a:r>
+            <a:endParaRPr sz="1400" b="0">
+              <a:solidFill>
+                <a:srgbClr val="1E3A8A"/>
+              </a:solidFill>
+              <a:latin typeface="微软雅黑" panose="020B0503020204020204" charset="-122"/>
+            </a:endParaRPr>
           </a:p>
           <a:p>
             <a:pPr algn="l">
@@ -5732,10 +6074,16 @@
                 <a:solidFill>
                   <a:srgbClr val="1E3A8A"/>
                 </a:solidFill>
-                <a:latin typeface="微软雅黑"/>
+                <a:latin typeface="微软雅黑" panose="020B0503020204020204" charset="-122"/>
               </a:rPr>
               <a:t>把图文材料变成可检索、可溯源、有依赖关系的知识骨架</a:t>
             </a:r>
+            <a:endParaRPr sz="1400" b="0">
+              <a:solidFill>
+                <a:srgbClr val="1E3A8A"/>
+              </a:solidFill>
+              <a:latin typeface="微软雅黑" panose="020B0503020204020204" charset="-122"/>
+            </a:endParaRPr>
           </a:p>
           <a:p>
             <a:pPr algn="l">
@@ -5748,10 +6096,16 @@
                 <a:solidFill>
                   <a:srgbClr val="1E3A8A"/>
                 </a:solidFill>
-                <a:latin typeface="微软雅黑"/>
+                <a:latin typeface="微软雅黑" panose="020B0503020204020204" charset="-122"/>
               </a:rPr>
               <a:t>—— 再据此做苏格拉底式答疑。</a:t>
             </a:r>
+            <a:endParaRPr sz="1400" b="0">
+              <a:solidFill>
+                <a:srgbClr val="1E3A8A"/>
+              </a:solidFill>
+              <a:latin typeface="微软雅黑" panose="020B0503020204020204" charset="-122"/>
+            </a:endParaRPr>
           </a:p>
         </p:txBody>
       </p:sp>
@@ -5831,10 +6185,16 @@
                 <a:solidFill>
                   <a:srgbClr val="FFFFFF"/>
                 </a:solidFill>
-                <a:latin typeface="微软雅黑"/>
+                <a:latin typeface="微软雅黑" panose="020B0503020204020204" charset="-122"/>
               </a:rPr>
               <a:t>一句话口径：别直接给答案，帮我搞懂我卡在哪</a:t>
             </a:r>
+            <a:endParaRPr sz="2200" b="1">
+              <a:solidFill>
+                <a:srgbClr val="FFFFFF"/>
+              </a:solidFill>
+              <a:latin typeface="微软雅黑" panose="020B0503020204020204" charset="-122"/>
+            </a:endParaRPr>
           </a:p>
         </p:txBody>
       </p:sp>
@@ -5870,10 +6230,16 @@
                 <a:solidFill>
                   <a:srgbClr val="64748B"/>
                 </a:solidFill>
-                <a:latin typeface="微软雅黑"/>
+                <a:latin typeface="微软雅黑" panose="020B0503020204020204" charset="-122"/>
               </a:rPr>
               <a:t>三个断点 → 三件事：读不进去（格式混着，检索不到一起）⇒ 统一转 Markdown；</a:t>
             </a:r>
+            <a:endParaRPr sz="1300" b="0">
+              <a:solidFill>
+                <a:srgbClr val="64748B"/>
+              </a:solidFill>
+              <a:latin typeface="微软雅黑" panose="020B0503020204020204" charset="-122"/>
+            </a:endParaRPr>
           </a:p>
           <a:p>
             <a:pPr algn="l">
@@ -5886,10 +6252,16 @@
                 <a:solidFill>
                   <a:srgbClr val="64748B"/>
                 </a:solidFill>
-                <a:latin typeface="微软雅黑"/>
+                <a:latin typeface="微软雅黑" panose="020B0503020204020204" charset="-122"/>
               </a:rPr>
               <a:t>理不清（材料线性、知识有依赖）⇒ 抽三级结构 + 依赖图；问不明白（工具直接给答案）⇒ 状态机驱动的引导式答疑。</a:t>
             </a:r>
+            <a:endParaRPr sz="1300" b="0">
+              <a:solidFill>
+                <a:srgbClr val="64748B"/>
+              </a:solidFill>
+              <a:latin typeface="微软雅黑" panose="020B0503020204020204" charset="-122"/>
+            </a:endParaRPr>
           </a:p>
         </p:txBody>
       </p:sp>
@@ -5969,10 +6341,16 @@
                 <a:solidFill>
                   <a:srgbClr val="64748B"/>
                 </a:solidFill>
-                <a:latin typeface="微软雅黑"/>
+                <a:latin typeface="微软雅黑" panose="020B0503020204020204" charset="-122"/>
               </a:rPr>
               <a:t>析知 XiZhi · 多模态教学智能体</a:t>
             </a:r>
+            <a:endParaRPr sz="1200" b="0">
+              <a:solidFill>
+                <a:srgbClr val="64748B"/>
+              </a:solidFill>
+              <a:latin typeface="微软雅黑" panose="020B0503020204020204" charset="-122"/>
+            </a:endParaRPr>
           </a:p>
         </p:txBody>
       </p:sp>
@@ -6008,10 +6386,16 @@
                 <a:solidFill>
                   <a:srgbClr val="64748B"/>
                 </a:solidFill>
-                <a:latin typeface="微软雅黑"/>
+                <a:latin typeface="微软雅黑" panose="020B0503020204020204" charset="-122"/>
               </a:rPr>
               <a:t>02 / 11</a:t>
             </a:r>
+            <a:endParaRPr sz="1200" b="0">
+              <a:solidFill>
+                <a:srgbClr val="64748B"/>
+              </a:solidFill>
+              <a:latin typeface="微软雅黑" panose="020B0503020204020204" charset="-122"/>
+            </a:endParaRPr>
           </a:p>
         </p:txBody>
       </p:sp>
@@ -6024,7 +6408,7 @@
 </file>
 
 <file path=ppt/slides/slide3.xml><?xml version="1.0" encoding="utf-8"?>
-<p:sld xmlns:a="http://schemas.openxmlformats.org/drawingml/2006/main" xmlns:p="http://schemas.openxmlformats.org/presentationml/2006/main" xmlns:r="http://schemas.openxmlformats.org/officeDocument/2006/relationships">
+<p:sld xmlns:a="http://schemas.openxmlformats.org/drawingml/2006/main" xmlns:r="http://schemas.openxmlformats.org/officeDocument/2006/relationships" xmlns:p="http://schemas.openxmlformats.org/presentationml/2006/main">
   <p:cSld>
     <p:spTree>
       <p:nvGrpSpPr>
@@ -6065,10 +6449,16 @@
                 <a:solidFill>
                   <a:srgbClr val="06B6D4"/>
                 </a:solidFill>
-                <a:latin typeface="微软雅黑"/>
+                <a:latin typeface="微软雅黑" panose="020B0503020204020204" charset="-122"/>
               </a:rPr>
               <a:t>02 · 赛题方向</a:t>
             </a:r>
+            <a:endParaRPr sz="1100" b="1">
+              <a:solidFill>
+                <a:srgbClr val="06B6D4"/>
+              </a:solidFill>
+              <a:latin typeface="微软雅黑" panose="020B0503020204020204" charset="-122"/>
+            </a:endParaRPr>
           </a:p>
         </p:txBody>
       </p:sp>
@@ -6104,10 +6494,16 @@
                 <a:solidFill>
                   <a:srgbClr val="0F172A"/>
                 </a:solidFill>
-                <a:latin typeface="微软雅黑"/>
+                <a:latin typeface="微软雅黑" panose="020B0503020204020204" charset="-122"/>
               </a:rPr>
               <a:t>方向一「AI + 教学管理助手」· 手册五要素对照</a:t>
             </a:r>
+            <a:endParaRPr sz="2900" b="1">
+              <a:solidFill>
+                <a:srgbClr val="0F172A"/>
+              </a:solidFill>
+              <a:latin typeface="微软雅黑" panose="020B0503020204020204" charset="-122"/>
+            </a:endParaRPr>
           </a:p>
         </p:txBody>
       </p:sp>
@@ -6143,10 +6539,16 @@
                 <a:solidFill>
                   <a:srgbClr val="64748B"/>
                 </a:solidFill>
-                <a:latin typeface="微软雅黑"/>
+                <a:latin typeface="微软雅黑" panose="020B0503020204020204" charset="-122"/>
               </a:rPr>
               <a:t>手册要求的五要素，在本 PPT 里的位置：</a:t>
             </a:r>
+            <a:endParaRPr sz="1300" b="0">
+              <a:solidFill>
+                <a:srgbClr val="64748B"/>
+              </a:solidFill>
+              <a:latin typeface="微软雅黑" panose="020B0503020204020204" charset="-122"/>
+            </a:endParaRPr>
           </a:p>
         </p:txBody>
       </p:sp>
@@ -6270,10 +6672,16 @@
                 <a:solidFill>
                   <a:srgbClr val="0F172A"/>
                 </a:solidFill>
-                <a:latin typeface="微软雅黑"/>
+                <a:latin typeface="微软雅黑" panose="020B0503020204020204" charset="-122"/>
               </a:rPr>
               <a:t>作品简介</a:t>
             </a:r>
+            <a:endParaRPr sz="1600" b="1">
+              <a:solidFill>
+                <a:srgbClr val="0F172A"/>
+              </a:solidFill>
+              <a:latin typeface="微软雅黑" panose="020B0503020204020204" charset="-122"/>
+            </a:endParaRPr>
           </a:p>
         </p:txBody>
       </p:sp>
@@ -6309,10 +6717,16 @@
                 <a:solidFill>
                   <a:srgbClr val="3B82F6"/>
                 </a:solidFill>
-                <a:latin typeface="Consolas"/>
+                <a:latin typeface="Consolas" panose="020B0609020204030204"/>
               </a:rPr>
               <a:t>第 2 页</a:t>
             </a:r>
+            <a:endParaRPr sz="1400" b="1">
+              <a:solidFill>
+                <a:srgbClr val="3B82F6"/>
+              </a:solidFill>
+              <a:latin typeface="Consolas" panose="020B0609020204030204"/>
+            </a:endParaRPr>
           </a:p>
         </p:txBody>
       </p:sp>
@@ -6348,10 +6762,16 @@
                 <a:solidFill>
                   <a:srgbClr val="64748B"/>
                 </a:solidFill>
-                <a:latin typeface="微软雅黑"/>
+                <a:latin typeface="微软雅黑" panose="020B0503020204020204" charset="-122"/>
               </a:rPr>
               <a:t>面向什么教学场景、解决什么断点</a:t>
             </a:r>
+            <a:endParaRPr sz="1300" b="0">
+              <a:solidFill>
+                <a:srgbClr val="64748B"/>
+              </a:solidFill>
+              <a:latin typeface="微软雅黑" panose="020B0503020204020204" charset="-122"/>
+            </a:endParaRPr>
           </a:p>
         </p:txBody>
       </p:sp>
@@ -6475,10 +6895,16 @@
                 <a:solidFill>
                   <a:srgbClr val="0F172A"/>
                 </a:solidFill>
-                <a:latin typeface="微软雅黑"/>
+                <a:latin typeface="微软雅黑" panose="020B0503020204020204" charset="-122"/>
               </a:rPr>
               <a:t>赛题方向</a:t>
             </a:r>
+            <a:endParaRPr sz="1600" b="1">
+              <a:solidFill>
+                <a:srgbClr val="0F172A"/>
+              </a:solidFill>
+              <a:latin typeface="微软雅黑" panose="020B0503020204020204" charset="-122"/>
+            </a:endParaRPr>
           </a:p>
         </p:txBody>
       </p:sp>
@@ -6514,10 +6940,16 @@
                 <a:solidFill>
                   <a:srgbClr val="3B82F6"/>
                 </a:solidFill>
-                <a:latin typeface="Consolas"/>
+                <a:latin typeface="Consolas" panose="020B0609020204030204"/>
               </a:rPr>
               <a:t>本页</a:t>
             </a:r>
+            <a:endParaRPr sz="1400" b="1">
+              <a:solidFill>
+                <a:srgbClr val="3B82F6"/>
+              </a:solidFill>
+              <a:latin typeface="Consolas" panose="020B0609020204030204"/>
+            </a:endParaRPr>
           </a:p>
         </p:txBody>
       </p:sp>
@@ -6553,10 +6985,16 @@
                 <a:solidFill>
                   <a:srgbClr val="64748B"/>
                 </a:solidFill>
-                <a:latin typeface="微软雅黑"/>
+                <a:latin typeface="微软雅黑" panose="020B0503020204020204" charset="-122"/>
               </a:rPr>
               <a:t>与方向一的对应关系</a:t>
             </a:r>
+            <a:endParaRPr sz="1300" b="0">
+              <a:solidFill>
+                <a:srgbClr val="64748B"/>
+              </a:solidFill>
+              <a:latin typeface="微软雅黑" panose="020B0503020204020204" charset="-122"/>
+            </a:endParaRPr>
           </a:p>
         </p:txBody>
       </p:sp>
@@ -6680,10 +7118,16 @@
                 <a:solidFill>
                   <a:srgbClr val="0F172A"/>
                 </a:solidFill>
-                <a:latin typeface="微软雅黑"/>
+                <a:latin typeface="微软雅黑" panose="020B0503020204020204" charset="-122"/>
               </a:rPr>
               <a:t>AI 能力说明</a:t>
             </a:r>
+            <a:endParaRPr sz="1600" b="1">
+              <a:solidFill>
+                <a:srgbClr val="0F172A"/>
+              </a:solidFill>
+              <a:latin typeface="微软雅黑" panose="020B0503020204020204" charset="-122"/>
+            </a:endParaRPr>
           </a:p>
         </p:txBody>
       </p:sp>
@@ -6719,10 +7163,16 @@
                 <a:solidFill>
                   <a:srgbClr val="3B82F6"/>
                 </a:solidFill>
-                <a:latin typeface="Consolas"/>
+                <a:latin typeface="Consolas" panose="020B0609020204030204"/>
               </a:rPr>
               <a:t>第 6 / 8 页</a:t>
             </a:r>
+            <a:endParaRPr sz="1400" b="1">
+              <a:solidFill>
+                <a:srgbClr val="3B82F6"/>
+              </a:solidFill>
+              <a:latin typeface="Consolas" panose="020B0609020204030204"/>
+            </a:endParaRPr>
           </a:p>
         </p:txBody>
       </p:sp>
@@ -6758,10 +7208,16 @@
                 <a:solidFill>
                   <a:srgbClr val="64748B"/>
                 </a:solidFill>
-                <a:latin typeface="微软雅黑"/>
+                <a:latin typeface="微软雅黑" panose="020B0503020204020204" charset="-122"/>
               </a:rPr>
               <a:t>AI 在链路中承担什么、刻意不承担什么</a:t>
             </a:r>
+            <a:endParaRPr sz="1300" b="0">
+              <a:solidFill>
+                <a:srgbClr val="64748B"/>
+              </a:solidFill>
+              <a:latin typeface="微软雅黑" panose="020B0503020204020204" charset="-122"/>
+            </a:endParaRPr>
           </a:p>
         </p:txBody>
       </p:sp>
@@ -6885,10 +7341,16 @@
                 <a:solidFill>
                   <a:srgbClr val="0F172A"/>
                 </a:solidFill>
-                <a:latin typeface="微软雅黑"/>
+                <a:latin typeface="微软雅黑" panose="020B0503020204020204" charset="-122"/>
               </a:rPr>
               <a:t>技术方案</a:t>
             </a:r>
+            <a:endParaRPr sz="1600" b="1">
+              <a:solidFill>
+                <a:srgbClr val="0F172A"/>
+              </a:solidFill>
+              <a:latin typeface="微软雅黑" panose="020B0503020204020204" charset="-122"/>
+            </a:endParaRPr>
           </a:p>
         </p:txBody>
       </p:sp>
@@ -6924,10 +7386,16 @@
                 <a:solidFill>
                   <a:srgbClr val="3B82F6"/>
                 </a:solidFill>
-                <a:latin typeface="Consolas"/>
+                <a:latin typeface="Consolas" panose="020B0609020204030204"/>
               </a:rPr>
               <a:t>第 4 / 5 页</a:t>
             </a:r>
+            <a:endParaRPr sz="1400" b="1">
+              <a:solidFill>
+                <a:srgbClr val="3B82F6"/>
+              </a:solidFill>
+              <a:latin typeface="Consolas" panose="020B0609020204030204"/>
+            </a:endParaRPr>
           </a:p>
         </p:txBody>
       </p:sp>
@@ -6963,10 +7431,16 @@
                 <a:solidFill>
                   <a:srgbClr val="64748B"/>
                 </a:solidFill>
-                <a:latin typeface="微软雅黑"/>
+                <a:latin typeface="微软雅黑" panose="020B0503020204020204" charset="-122"/>
               </a:rPr>
               <a:t>四层架构 · 核心创新 · 关键取舍</a:t>
             </a:r>
+            <a:endParaRPr sz="1300" b="0">
+              <a:solidFill>
+                <a:srgbClr val="64748B"/>
+              </a:solidFill>
+              <a:latin typeface="微软雅黑" panose="020B0503020204020204" charset="-122"/>
+            </a:endParaRPr>
           </a:p>
         </p:txBody>
       </p:sp>
@@ -7090,10 +7564,16 @@
                 <a:solidFill>
                   <a:srgbClr val="0F172A"/>
                 </a:solidFill>
-                <a:latin typeface="微软雅黑"/>
+                <a:latin typeface="微软雅黑" panose="020B0503020204020204" charset="-122"/>
               </a:rPr>
               <a:t>团队成员信息</a:t>
             </a:r>
+            <a:endParaRPr sz="1600" b="1">
+              <a:solidFill>
+                <a:srgbClr val="0F172A"/>
+              </a:solidFill>
+              <a:latin typeface="微软雅黑" panose="020B0503020204020204" charset="-122"/>
+            </a:endParaRPr>
           </a:p>
         </p:txBody>
       </p:sp>
@@ -7129,10 +7609,16 @@
                 <a:solidFill>
                   <a:srgbClr val="3B82F6"/>
                 </a:solidFill>
-                <a:latin typeface="Consolas"/>
+                <a:latin typeface="Consolas" panose="020B0609020204030204"/>
               </a:rPr>
               <a:t>第 11 页</a:t>
             </a:r>
+            <a:endParaRPr sz="1400" b="1">
+              <a:solidFill>
+                <a:srgbClr val="3B82F6"/>
+              </a:solidFill>
+              <a:latin typeface="Consolas" panose="020B0609020204030204"/>
+            </a:endParaRPr>
           </a:p>
         </p:txBody>
       </p:sp>
@@ -7168,10 +7654,16 @@
                 <a:solidFill>
                   <a:srgbClr val="64748B"/>
                 </a:solidFill>
-                <a:latin typeface="微软雅黑"/>
+                <a:latin typeface="微软雅黑" panose="020B0503020204020204" charset="-122"/>
               </a:rPr>
               <a:t>分工与专业背景</a:t>
             </a:r>
+            <a:endParaRPr sz="1300" b="0">
+              <a:solidFill>
+                <a:srgbClr val="64748B"/>
+              </a:solidFill>
+              <a:latin typeface="微软雅黑" panose="020B0503020204020204" charset="-122"/>
+            </a:endParaRPr>
           </a:p>
         </p:txBody>
       </p:sp>
@@ -7207,10 +7699,16 @@
                 <a:solidFill>
                   <a:srgbClr val="EA580C"/>
                 </a:solidFill>
-                <a:latin typeface="微软雅黑"/>
+                <a:latin typeface="微软雅黑" panose="020B0503020204020204" charset="-122"/>
               </a:rPr>
               <a:t>⚠️ 手册明确禁止出现「我们来自不同专业」—— 三人同属计算机与软件学院 · 人工智能专业。</a:t>
             </a:r>
+            <a:endParaRPr sz="1200" b="0">
+              <a:solidFill>
+                <a:srgbClr val="EA580C"/>
+              </a:solidFill>
+              <a:latin typeface="微软雅黑" panose="020B0503020204020204" charset="-122"/>
+            </a:endParaRPr>
           </a:p>
         </p:txBody>
       </p:sp>
@@ -7290,10 +7788,16 @@
                 <a:solidFill>
                   <a:srgbClr val="64748B"/>
                 </a:solidFill>
-                <a:latin typeface="微软雅黑"/>
+                <a:latin typeface="微软雅黑" panose="020B0503020204020204" charset="-122"/>
               </a:rPr>
               <a:t>析知 XiZhi · 多模态教学智能体</a:t>
             </a:r>
+            <a:endParaRPr sz="1200" b="0">
+              <a:solidFill>
+                <a:srgbClr val="64748B"/>
+              </a:solidFill>
+              <a:latin typeface="微软雅黑" panose="020B0503020204020204" charset="-122"/>
+            </a:endParaRPr>
           </a:p>
         </p:txBody>
       </p:sp>
@@ -7329,10 +7833,16 @@
                 <a:solidFill>
                   <a:srgbClr val="64748B"/>
                 </a:solidFill>
-                <a:latin typeface="微软雅黑"/>
+                <a:latin typeface="微软雅黑" panose="020B0503020204020204" charset="-122"/>
               </a:rPr>
               <a:t>03 / 11</a:t>
             </a:r>
+            <a:endParaRPr sz="1200" b="0">
+              <a:solidFill>
+                <a:srgbClr val="64748B"/>
+              </a:solidFill>
+              <a:latin typeface="微软雅黑" panose="020B0503020204020204" charset="-122"/>
+            </a:endParaRPr>
           </a:p>
         </p:txBody>
       </p:sp>
@@ -7345,7 +7855,7 @@
 </file>
 
 <file path=ppt/slides/slide4.xml><?xml version="1.0" encoding="utf-8"?>
-<p:sld xmlns:a="http://schemas.openxmlformats.org/drawingml/2006/main" xmlns:p="http://schemas.openxmlformats.org/presentationml/2006/main" xmlns:r="http://schemas.openxmlformats.org/officeDocument/2006/relationships">
+<p:sld xmlns:a="http://schemas.openxmlformats.org/drawingml/2006/main" xmlns:r="http://schemas.openxmlformats.org/officeDocument/2006/relationships" xmlns:p="http://schemas.openxmlformats.org/presentationml/2006/main">
   <p:cSld>
     <p:spTree>
       <p:nvGrpSpPr>
@@ -7430,10 +7940,16 @@
                 <a:solidFill>
                   <a:srgbClr val="67E8F9"/>
                 </a:solidFill>
-                <a:latin typeface="微软雅黑"/>
+                <a:latin typeface="微软雅黑" panose="020B0503020204020204" charset="-122"/>
               </a:rPr>
               <a:t>03 · 核心创新点 · ★ 全片最重要的一页</a:t>
             </a:r>
+            <a:endParaRPr sz="1100" b="1">
+              <a:solidFill>
+                <a:srgbClr val="67E8F9"/>
+              </a:solidFill>
+              <a:latin typeface="微软雅黑" panose="020B0503020204020204" charset="-122"/>
+            </a:endParaRPr>
           </a:p>
         </p:txBody>
       </p:sp>
@@ -7469,10 +7985,16 @@
                 <a:solidFill>
                   <a:srgbClr val="FFFFFF"/>
                 </a:solidFill>
-                <a:latin typeface="微软雅黑"/>
+                <a:latin typeface="微软雅黑" panose="020B0503020204020204" charset="-122"/>
               </a:rPr>
               <a:t>AI 预抽取 + 人工校验的依赖图构建</a:t>
             </a:r>
+            <a:endParaRPr sz="3000" b="1">
+              <a:solidFill>
+                <a:srgbClr val="FFFFFF"/>
+              </a:solidFill>
+              <a:latin typeface="微软雅黑" panose="020B0503020204020204" charset="-122"/>
+            </a:endParaRPr>
           </a:p>
         </p:txBody>
       </p:sp>
@@ -7508,10 +8030,16 @@
                 <a:solidFill>
                   <a:srgbClr val="93C5FD"/>
                 </a:solidFill>
-                <a:latin typeface="微软雅黑"/>
+                <a:latin typeface="微软雅黑" panose="020B0503020204020204" charset="-122"/>
               </a:rPr>
               <a:t>并首次把「教学依赖图必须无环」作为工程不变量强制保证</a:t>
             </a:r>
+            <a:endParaRPr sz="1500" b="0">
+              <a:solidFill>
+                <a:srgbClr val="93C5FD"/>
+              </a:solidFill>
+              <a:latin typeface="微软雅黑" panose="020B0503020204020204" charset="-122"/>
+            </a:endParaRPr>
           </a:p>
         </p:txBody>
       </p:sp>
@@ -7635,10 +8163,16 @@
                 <a:solidFill>
                   <a:srgbClr val="0F172A"/>
                 </a:solidFill>
-                <a:latin typeface="微软雅黑"/>
+                <a:latin typeface="微软雅黑" panose="020B0503020204020204" charset="-122"/>
               </a:rPr>
               <a:t>写库前校验</a:t>
             </a:r>
+            <a:endParaRPr sz="1600" b="1">
+              <a:solidFill>
+                <a:srgbClr val="0F172A"/>
+              </a:solidFill>
+              <a:latin typeface="微软雅黑" panose="020B0503020204020204" charset="-122"/>
+            </a:endParaRPr>
           </a:p>
         </p:txBody>
       </p:sp>
@@ -7674,10 +8208,16 @@
                 <a:solidFill>
                   <a:srgbClr val="64748B"/>
                 </a:solidFill>
-                <a:latin typeface="微软雅黑"/>
+                <a:latin typeface="微软雅黑" panose="020B0503020204020204" charset="-122"/>
               </a:rPr>
               <a:t>环校验在完整图上做，不是截断后的子图；</a:t>
             </a:r>
+            <a:endParaRPr sz="1200" b="0">
+              <a:solidFill>
+                <a:srgbClr val="64748B"/>
+              </a:solidFill>
+              <a:latin typeface="微软雅黑" panose="020B0503020204020204" charset="-122"/>
+            </a:endParaRPr>
           </a:p>
           <a:p>
             <a:pPr algn="l">
@@ -7690,10 +8230,16 @@
                 <a:solidFill>
                   <a:srgbClr val="64748B"/>
                 </a:solidFill>
-                <a:latin typeface="微软雅黑"/>
+                <a:latin typeface="微软雅黑" panose="020B0503020204020204" charset="-122"/>
               </a:rPr>
               <a:t>违规即剪枝，且同时报出被剪数量与待复核数量。</a:t>
             </a:r>
+            <a:endParaRPr sz="1200" b="0">
+              <a:solidFill>
+                <a:srgbClr val="64748B"/>
+              </a:solidFill>
+              <a:latin typeface="微软雅黑" panose="020B0503020204020204" charset="-122"/>
+            </a:endParaRPr>
           </a:p>
         </p:txBody>
       </p:sp>
@@ -7817,10 +8363,16 @@
                 <a:solidFill>
                   <a:srgbClr val="0F172A"/>
                 </a:solidFill>
-                <a:latin typeface="微软雅黑"/>
+                <a:latin typeface="微软雅黑" panose="020B0503020204020204" charset="-122"/>
               </a:rPr>
               <a:t>双通道融合</a:t>
             </a:r>
+            <a:endParaRPr sz="1600" b="1">
+              <a:solidFill>
+                <a:srgbClr val="0F172A"/>
+              </a:solidFill>
+              <a:latin typeface="微软雅黑" panose="020B0503020204020204" charset="-122"/>
+            </a:endParaRPr>
           </a:p>
         </p:txBody>
       </p:sp>
@@ -7856,10 +8408,16 @@
                 <a:solidFill>
                   <a:srgbClr val="64748B"/>
                 </a:solidFill>
-                <a:latin typeface="微软雅黑"/>
+                <a:latin typeface="微软雅黑" panose="020B0503020204020204" charset="-122"/>
               </a:rPr>
               <a:t>结构线索 × 语义线索两条通道独立判前置；</a:t>
             </a:r>
+            <a:endParaRPr sz="1200" b="0">
+              <a:solidFill>
+                <a:srgbClr val="64748B"/>
+              </a:solidFill>
+              <a:latin typeface="微软雅黑" panose="020B0503020204020204" charset="-122"/>
+            </a:endParaRPr>
           </a:p>
           <a:p>
             <a:pPr algn="l">
@@ -7872,10 +8430,16 @@
                 <a:solidFill>
                   <a:srgbClr val="64748B"/>
                 </a:solidFill>
-                <a:latin typeface="微软雅黑"/>
+                <a:latin typeface="微软雅黑" panose="020B0503020204020204" charset="-122"/>
               </a:rPr>
               <a:t>冲突不静默采纳，降 confidence 标 needs_review。</a:t>
             </a:r>
+            <a:endParaRPr sz="1200" b="0">
+              <a:solidFill>
+                <a:srgbClr val="64748B"/>
+              </a:solidFill>
+              <a:latin typeface="微软雅黑" panose="020B0503020204020204" charset="-122"/>
+            </a:endParaRPr>
           </a:p>
         </p:txBody>
       </p:sp>
@@ -7999,10 +8563,16 @@
                 <a:solidFill>
                   <a:srgbClr val="0F172A"/>
                 </a:solidFill>
-                <a:latin typeface="微软雅黑"/>
+                <a:latin typeface="微软雅黑" panose="020B0503020204020204" charset="-122"/>
               </a:rPr>
               <a:t>边带理由 + 溯源</a:t>
             </a:r>
+            <a:endParaRPr sz="1600" b="1">
+              <a:solidFill>
+                <a:srgbClr val="0F172A"/>
+              </a:solidFill>
+              <a:latin typeface="微软雅黑" panose="020B0503020204020204" charset="-122"/>
+            </a:endParaRPr>
           </a:p>
         </p:txBody>
       </p:sp>
@@ -8038,10 +8608,16 @@
                 <a:solidFill>
                   <a:srgbClr val="64748B"/>
                 </a:solidFill>
-                <a:latin typeface="微软雅黑"/>
+                <a:latin typeface="微软雅黑" panose="020B0503020204020204" charset="-122"/>
               </a:rPr>
               <a:t>每条 hard 边带 reason + 材料原文引用；</a:t>
             </a:r>
+            <a:endParaRPr sz="1200" b="0">
+              <a:solidFill>
+                <a:srgbClr val="64748B"/>
+              </a:solidFill>
+              <a:latin typeface="微软雅黑" panose="020B0503020204020204" charset="-122"/>
+            </a:endParaRPr>
           </a:p>
           <a:p>
             <a:pPr algn="l">
@@ -8054,10 +8630,16 @@
                 <a:solidFill>
                   <a:srgbClr val="64748B"/>
                 </a:solidFill>
-                <a:latin typeface="微软雅黑"/>
+                <a:latin typeface="微软雅黑" panose="020B0503020204020204" charset="-122"/>
               </a:rPr>
               <a:t>理由完备率 100%，可逐条复核。</a:t>
             </a:r>
+            <a:endParaRPr sz="1200" b="0">
+              <a:solidFill>
+                <a:srgbClr val="64748B"/>
+              </a:solidFill>
+              <a:latin typeface="微软雅黑" panose="020B0503020204020204" charset="-122"/>
+            </a:endParaRPr>
           </a:p>
         </p:txBody>
       </p:sp>
@@ -8181,10 +8763,16 @@
                 <a:solidFill>
                   <a:srgbClr val="0F172A"/>
                 </a:solidFill>
-                <a:latin typeface="微软雅黑"/>
+                <a:latin typeface="微软雅黑" panose="020B0503020204020204" charset="-122"/>
               </a:rPr>
               <a:t>根因回溯</a:t>
             </a:r>
+            <a:endParaRPr sz="1600" b="1">
+              <a:solidFill>
+                <a:srgbClr val="0F172A"/>
+              </a:solidFill>
+              <a:latin typeface="微软雅黑" panose="020B0503020204020204" charset="-122"/>
+            </a:endParaRPr>
           </a:p>
         </p:txBody>
       </p:sp>
@@ -8220,10 +8808,16 @@
                 <a:solidFill>
                   <a:srgbClr val="64748B"/>
                 </a:solidFill>
-                <a:latin typeface="微软雅黑"/>
+                <a:latin typeface="微软雅黑" panose="020B0503020204020204" charset="-122"/>
               </a:rPr>
               <a:t>卡点时反向回溯是哪条前置没懂；</a:t>
             </a:r>
+            <a:endParaRPr sz="1200" b="0">
+              <a:solidFill>
+                <a:srgbClr val="64748B"/>
+              </a:solidFill>
+              <a:latin typeface="微软雅黑" panose="020B0503020204020204" charset="-122"/>
+            </a:endParaRPr>
           </a:p>
           <a:p>
             <a:pPr algn="l">
@@ -8236,10 +8830,16 @@
                 <a:solidFill>
                   <a:srgbClr val="64748B"/>
                 </a:solidFill>
-                <a:latin typeface="微软雅黑"/>
+                <a:latin typeface="微软雅黑" panose="020B0503020204020204" charset="-122"/>
               </a:rPr>
               <a:t>路径与根因都可解释，不是黑箱排序。</a:t>
             </a:r>
+            <a:endParaRPr sz="1200" b="0">
+              <a:solidFill>
+                <a:srgbClr val="64748B"/>
+              </a:solidFill>
+              <a:latin typeface="微软雅黑" panose="020B0503020204020204" charset="-122"/>
+            </a:endParaRPr>
           </a:p>
         </p:txBody>
       </p:sp>
@@ -8275,10 +8875,16 @@
                 <a:solidFill>
                   <a:srgbClr val="64748B"/>
                 </a:solidFill>
-                <a:latin typeface="微软雅黑"/>
+                <a:latin typeface="微软雅黑" panose="020B0503020204020204" charset="-122"/>
               </a:rPr>
               <a:t>可当场验证：图上 213 节点 / 229 边，环数 = 0　·　空白依据：DeepTutor（3.44 万★）无依赖图；Marble（3849★）有依赖图但人工标注、不读材料</a:t>
             </a:r>
+            <a:endParaRPr sz="1200" b="0">
+              <a:solidFill>
+                <a:srgbClr val="64748B"/>
+              </a:solidFill>
+              <a:latin typeface="微软雅黑" panose="020B0503020204020204" charset="-122"/>
+            </a:endParaRPr>
           </a:p>
         </p:txBody>
       </p:sp>
@@ -8358,10 +8964,16 @@
                 <a:solidFill>
                   <a:srgbClr val="64748B"/>
                 </a:solidFill>
-                <a:latin typeface="微软雅黑"/>
+                <a:latin typeface="微软雅黑" panose="020B0503020204020204" charset="-122"/>
               </a:rPr>
               <a:t>析知 XiZhi · 多模态教学智能体</a:t>
             </a:r>
+            <a:endParaRPr sz="1200" b="0">
+              <a:solidFill>
+                <a:srgbClr val="64748B"/>
+              </a:solidFill>
+              <a:latin typeface="微软雅黑" panose="020B0503020204020204" charset="-122"/>
+            </a:endParaRPr>
           </a:p>
         </p:txBody>
       </p:sp>
@@ -8397,10 +9009,16 @@
                 <a:solidFill>
                   <a:srgbClr val="64748B"/>
                 </a:solidFill>
-                <a:latin typeface="微软雅黑"/>
+                <a:latin typeface="微软雅黑" panose="020B0503020204020204" charset="-122"/>
               </a:rPr>
               <a:t>04 / 11</a:t>
             </a:r>
+            <a:endParaRPr sz="1200" b="0">
+              <a:solidFill>
+                <a:srgbClr val="64748B"/>
+              </a:solidFill>
+              <a:latin typeface="微软雅黑" panose="020B0503020204020204" charset="-122"/>
+            </a:endParaRPr>
           </a:p>
         </p:txBody>
       </p:sp>
@@ -8413,7 +9031,7 @@
 </file>
 
 <file path=ppt/slides/slide5.xml><?xml version="1.0" encoding="utf-8"?>
-<p:sld xmlns:a="http://schemas.openxmlformats.org/drawingml/2006/main" xmlns:p="http://schemas.openxmlformats.org/presentationml/2006/main" xmlns:r="http://schemas.openxmlformats.org/officeDocument/2006/relationships">
+<p:sld xmlns:a="http://schemas.openxmlformats.org/drawingml/2006/main" xmlns:r="http://schemas.openxmlformats.org/officeDocument/2006/relationships" xmlns:p="http://schemas.openxmlformats.org/presentationml/2006/main">
   <p:cSld>
     <p:spTree>
       <p:nvGrpSpPr>
@@ -8454,10 +9072,16 @@
                 <a:solidFill>
                   <a:srgbClr val="06B6D4"/>
                 </a:solidFill>
-                <a:latin typeface="微软雅黑"/>
+                <a:latin typeface="微软雅黑" panose="020B0503020204020204" charset="-122"/>
               </a:rPr>
               <a:t>04 · 技术方案</a:t>
             </a:r>
+            <a:endParaRPr sz="1100" b="1">
+              <a:solidFill>
+                <a:srgbClr val="06B6D4"/>
+              </a:solidFill>
+              <a:latin typeface="微软雅黑" panose="020B0503020204020204" charset="-122"/>
+            </a:endParaRPr>
           </a:p>
         </p:txBody>
       </p:sp>
@@ -8493,10 +9117,16 @@
                 <a:solidFill>
                   <a:srgbClr val="0F172A"/>
                 </a:solidFill>
-                <a:latin typeface="微软雅黑"/>
+                <a:latin typeface="微软雅黑" panose="020B0503020204020204" charset="-122"/>
               </a:rPr>
               <a:t>四层架构，其中两层零模型依赖</a:t>
             </a:r>
+            <a:endParaRPr sz="2900" b="1">
+              <a:solidFill>
+                <a:srgbClr val="0F172A"/>
+              </a:solidFill>
+              <a:latin typeface="微软雅黑" panose="020B0503020204020204" charset="-122"/>
+            </a:endParaRPr>
           </a:p>
         </p:txBody>
       </p:sp>
@@ -8620,10 +9250,16 @@
                 <a:solidFill>
                   <a:srgbClr val="0F172A"/>
                 </a:solidFill>
-                <a:latin typeface="微软雅黑"/>
+                <a:latin typeface="微软雅黑" panose="020B0503020204020204" charset="-122"/>
               </a:rPr>
               <a:t>① 解析</a:t>
             </a:r>
+            <a:endParaRPr sz="1700" b="1">
+              <a:solidFill>
+                <a:srgbClr val="0F172A"/>
+              </a:solidFill>
+              <a:latin typeface="微软雅黑" panose="020B0503020204020204" charset="-122"/>
+            </a:endParaRPr>
           </a:p>
         </p:txBody>
       </p:sp>
@@ -8659,10 +9295,16 @@
                 <a:solidFill>
                   <a:srgbClr val="334155"/>
                 </a:solidFill>
-                <a:latin typeface="微软雅黑"/>
+                <a:latin typeface="微软雅黑" panose="020B0503020204020204" charset="-122"/>
               </a:rPr>
               <a:t>PaddleOCR（本地）→ 统一转 Markdown（带页码锚点）</a:t>
             </a:r>
+            <a:endParaRPr sz="1300" b="0">
+              <a:solidFill>
+                <a:srgbClr val="334155"/>
+              </a:solidFill>
+              <a:latin typeface="微软雅黑" panose="020B0503020204020204" charset="-122"/>
+            </a:endParaRPr>
           </a:p>
         </p:txBody>
       </p:sp>
@@ -8698,10 +9340,16 @@
                 <a:solidFill>
                   <a:srgbClr val="64748B"/>
                 </a:solidFill>
-                <a:latin typeface="微软雅黑"/>
+                <a:latin typeface="微软雅黑" panose="020B0503020204020204" charset="-122"/>
               </a:rPr>
               <a:t>依赖模型</a:t>
             </a:r>
+            <a:endParaRPr sz="1200" b="1">
+              <a:solidFill>
+                <a:srgbClr val="64748B"/>
+              </a:solidFill>
+              <a:latin typeface="微软雅黑" panose="020B0503020204020204" charset="-122"/>
+            </a:endParaRPr>
           </a:p>
         </p:txBody>
       </p:sp>
@@ -8825,10 +9473,16 @@
                 <a:solidFill>
                   <a:srgbClr val="0F172A"/>
                 </a:solidFill>
-                <a:latin typeface="微软雅黑"/>
+                <a:latin typeface="微软雅黑" panose="020B0503020204020204" charset="-122"/>
               </a:rPr>
               <a:t>② 结构化</a:t>
             </a:r>
+            <a:endParaRPr sz="1700" b="1">
+              <a:solidFill>
+                <a:srgbClr val="0F172A"/>
+              </a:solidFill>
+              <a:latin typeface="微软雅黑" panose="020B0503020204020204" charset="-122"/>
+            </a:endParaRPr>
           </a:p>
         </p:txBody>
       </p:sp>
@@ -8864,10 +9518,16 @@
                 <a:solidFill>
                   <a:srgbClr val="334155"/>
                 </a:solidFill>
-                <a:latin typeface="微软雅黑"/>
+                <a:latin typeface="微软雅黑" panose="020B0503020204020204" charset="-122"/>
               </a:rPr>
               <a:t>知识点三级结构（章 / 节 / 知识点），完整率与溯源覆盖率 100%</a:t>
             </a:r>
+            <a:endParaRPr sz="1300" b="0">
+              <a:solidFill>
+                <a:srgbClr val="334155"/>
+              </a:solidFill>
+              <a:latin typeface="微软雅黑" panose="020B0503020204020204" charset="-122"/>
+            </a:endParaRPr>
           </a:p>
         </p:txBody>
       </p:sp>
@@ -8903,10 +9563,16 @@
                 <a:solidFill>
                   <a:srgbClr val="64748B"/>
                 </a:solidFill>
-                <a:latin typeface="微软雅黑"/>
+                <a:latin typeface="微软雅黑" panose="020B0503020204020204" charset="-122"/>
               </a:rPr>
               <a:t>依赖模型</a:t>
             </a:r>
+            <a:endParaRPr sz="1200" b="1">
+              <a:solidFill>
+                <a:srgbClr val="64748B"/>
+              </a:solidFill>
+              <a:latin typeface="微软雅黑" panose="020B0503020204020204" charset="-122"/>
+            </a:endParaRPr>
           </a:p>
         </p:txBody>
       </p:sp>
@@ -9030,10 +9696,16 @@
                 <a:solidFill>
                   <a:srgbClr val="0F172A"/>
                 </a:solidFill>
-                <a:latin typeface="微软雅黑"/>
+                <a:latin typeface="微软雅黑" panose="020B0503020204020204" charset="-122"/>
               </a:rPr>
               <a:t>③ 图推理 ⭐</a:t>
             </a:r>
+            <a:endParaRPr sz="1700" b="1">
+              <a:solidFill>
+                <a:srgbClr val="0F172A"/>
+              </a:solidFill>
+              <a:latin typeface="微软雅黑" panose="020B0503020204020204" charset="-122"/>
+            </a:endParaRPr>
           </a:p>
         </p:txBody>
       </p:sp>
@@ -9069,10 +9741,16 @@
                 <a:solidFill>
                   <a:srgbClr val="334155"/>
                 </a:solidFill>
-                <a:latin typeface="微软雅黑"/>
+                <a:latin typeface="微软雅黑" panose="020B0503020204020204" charset="-122"/>
               </a:rPr>
               <a:t>依赖图校验 / 环路剪枝 / 学习路径 / 卡点回溯 —— 纯标准库</a:t>
             </a:r>
+            <a:endParaRPr sz="1300" b="0">
+              <a:solidFill>
+                <a:srgbClr val="334155"/>
+              </a:solidFill>
+              <a:latin typeface="微软雅黑" panose="020B0503020204020204" charset="-122"/>
+            </a:endParaRPr>
           </a:p>
         </p:txBody>
       </p:sp>
@@ -9108,10 +9786,16 @@
                 <a:solidFill>
                   <a:srgbClr val="06B6D4"/>
                 </a:solidFill>
-                <a:latin typeface="微软雅黑"/>
+                <a:latin typeface="微软雅黑" panose="020B0503020204020204" charset="-122"/>
               </a:rPr>
               <a:t>零模型依赖</a:t>
             </a:r>
+            <a:endParaRPr sz="1200" b="1">
+              <a:solidFill>
+                <a:srgbClr val="06B6D4"/>
+              </a:solidFill>
+              <a:latin typeface="微软雅黑" panose="020B0503020204020204" charset="-122"/>
+            </a:endParaRPr>
           </a:p>
         </p:txBody>
       </p:sp>
@@ -9235,10 +9919,16 @@
                 <a:solidFill>
                   <a:srgbClr val="0F172A"/>
                 </a:solidFill>
-                <a:latin typeface="微软雅黑"/>
+                <a:latin typeface="微软雅黑" panose="020B0503020204020204" charset="-122"/>
               </a:rPr>
               <a:t>④ 答疑</a:t>
             </a:r>
+            <a:endParaRPr sz="1700" b="1">
+              <a:solidFill>
+                <a:srgbClr val="0F172A"/>
+              </a:solidFill>
+              <a:latin typeface="微软雅黑" panose="020B0503020204020204" charset="-122"/>
+            </a:endParaRPr>
           </a:p>
         </p:txBody>
       </p:sp>
@@ -9274,10 +9964,16 @@
                 <a:solidFill>
                   <a:srgbClr val="334155"/>
                 </a:solidFill>
-                <a:latin typeface="微软雅黑"/>
+                <a:latin typeface="微软雅黑" panose="020B0503020204020204" charset="-122"/>
               </a:rPr>
               <a:t>状态机驱动的苏格拉底式引导（提问 → 提示 → 讲解）</a:t>
             </a:r>
+            <a:endParaRPr sz="1300" b="0">
+              <a:solidFill>
+                <a:srgbClr val="334155"/>
+              </a:solidFill>
+              <a:latin typeface="微软雅黑" panose="020B0503020204020204" charset="-122"/>
+            </a:endParaRPr>
           </a:p>
         </p:txBody>
       </p:sp>
@@ -9313,10 +10009,16 @@
                 <a:solidFill>
                   <a:srgbClr val="64748B"/>
                 </a:solidFill>
-                <a:latin typeface="微软雅黑"/>
+                <a:latin typeface="微软雅黑" panose="020B0503020204020204" charset="-122"/>
               </a:rPr>
               <a:t>依赖模型</a:t>
             </a:r>
+            <a:endParaRPr sz="1200" b="1">
+              <a:solidFill>
+                <a:srgbClr val="64748B"/>
+              </a:solidFill>
+              <a:latin typeface="微软雅黑" panose="020B0503020204020204" charset="-122"/>
+            </a:endParaRPr>
           </a:p>
         </p:txBody>
       </p:sp>
@@ -9396,10 +10098,16 @@
                 <a:solidFill>
                   <a:srgbClr val="3B82F6"/>
                 </a:solidFill>
-                <a:latin typeface="微软雅黑"/>
+                <a:latin typeface="微软雅黑" panose="020B0503020204020204" charset="-122"/>
               </a:rPr>
               <a:t>⭐ 关键路径放在确定性算法上，LLM 只做增强</a:t>
             </a:r>
+            <a:endParaRPr sz="1500" b="1">
+              <a:solidFill>
+                <a:srgbClr val="3B82F6"/>
+              </a:solidFill>
+              <a:latin typeface="微软雅黑" panose="020B0503020204020204" charset="-122"/>
+            </a:endParaRPr>
           </a:p>
         </p:txBody>
       </p:sp>
@@ -9479,10 +10187,16 @@
                 <a:solidFill>
                   <a:srgbClr val="64748B"/>
                 </a:solidFill>
-                <a:latin typeface="微软雅黑"/>
+                <a:latin typeface="微软雅黑" panose="020B0503020204020204" charset="-122"/>
               </a:rPr>
               <a:t>析知 XiZhi · 多模态教学智能体</a:t>
             </a:r>
+            <a:endParaRPr sz="1200" b="0">
+              <a:solidFill>
+                <a:srgbClr val="64748B"/>
+              </a:solidFill>
+              <a:latin typeface="微软雅黑" panose="020B0503020204020204" charset="-122"/>
+            </a:endParaRPr>
           </a:p>
         </p:txBody>
       </p:sp>
@@ -9518,10 +10232,16 @@
                 <a:solidFill>
                   <a:srgbClr val="64748B"/>
                 </a:solidFill>
-                <a:latin typeface="微软雅黑"/>
+                <a:latin typeface="微软雅黑" panose="020B0503020204020204" charset="-122"/>
               </a:rPr>
               <a:t>05 / 11</a:t>
             </a:r>
+            <a:endParaRPr sz="1200" b="0">
+              <a:solidFill>
+                <a:srgbClr val="64748B"/>
+              </a:solidFill>
+              <a:latin typeface="微软雅黑" panose="020B0503020204020204" charset="-122"/>
+            </a:endParaRPr>
           </a:p>
         </p:txBody>
       </p:sp>
@@ -9534,7 +10254,7 @@
 </file>
 
 <file path=ppt/slides/slide6.xml><?xml version="1.0" encoding="utf-8"?>
-<p:sld xmlns:a="http://schemas.openxmlformats.org/drawingml/2006/main" xmlns:p="http://schemas.openxmlformats.org/presentationml/2006/main" xmlns:r="http://schemas.openxmlformats.org/officeDocument/2006/relationships">
+<p:sld xmlns:a="http://schemas.openxmlformats.org/drawingml/2006/main" xmlns:r="http://schemas.openxmlformats.org/officeDocument/2006/relationships" xmlns:p="http://schemas.openxmlformats.org/presentationml/2006/main">
   <p:cSld>
     <p:spTree>
       <p:nvGrpSpPr>
@@ -9575,10 +10295,16 @@
                 <a:solidFill>
                   <a:srgbClr val="06B6D4"/>
                 </a:solidFill>
-                <a:latin typeface="微软雅黑"/>
+                <a:latin typeface="微软雅黑" panose="020B0503020204020204" charset="-122"/>
               </a:rPr>
               <a:t>05 · AI 能力说明</a:t>
             </a:r>
+            <a:endParaRPr sz="1100" b="1">
+              <a:solidFill>
+                <a:srgbClr val="06B6D4"/>
+              </a:solidFill>
+              <a:latin typeface="微软雅黑" panose="020B0503020204020204" charset="-122"/>
+            </a:endParaRPr>
           </a:p>
         </p:txBody>
       </p:sp>
@@ -9614,10 +10340,16 @@
                 <a:solidFill>
                   <a:srgbClr val="0F172A"/>
                 </a:solidFill>
-                <a:latin typeface="微软雅黑"/>
+                <a:latin typeface="微软雅黑" panose="020B0503020204020204" charset="-122"/>
               </a:rPr>
               <a:t>AI 干粗活 + 人做裁决</a:t>
             </a:r>
+            <a:endParaRPr sz="2900" b="1">
+              <a:solidFill>
+                <a:srgbClr val="0F172A"/>
+              </a:solidFill>
+              <a:latin typeface="微软雅黑" panose="020B0503020204020204" charset="-122"/>
+            </a:endParaRPr>
           </a:p>
         </p:txBody>
       </p:sp>
@@ -9697,10 +10429,16 @@
                 <a:solidFill>
                   <a:srgbClr val="0F172A"/>
                 </a:solidFill>
-                <a:latin typeface="微软雅黑"/>
+                <a:latin typeface="微软雅黑" panose="020B0503020204020204" charset="-122"/>
               </a:rPr>
               <a:t>AI 承担（粗活）</a:t>
             </a:r>
+            <a:endParaRPr sz="1700" b="1">
+              <a:solidFill>
+                <a:srgbClr val="0F172A"/>
+              </a:solidFill>
+              <a:latin typeface="微软雅黑" panose="020B0503020204020204" charset="-122"/>
+            </a:endParaRPr>
           </a:p>
         </p:txBody>
       </p:sp>
@@ -9736,10 +10474,16 @@
                 <a:solidFill>
                   <a:srgbClr val="64748B"/>
                 </a:solidFill>
-                <a:latin typeface="微软雅黑"/>
+                <a:latin typeface="微软雅黑" panose="020B0503020204020204" charset="-122"/>
               </a:rPr>
               <a:t>· 解析图文材料、识别版面</a:t>
             </a:r>
+            <a:endParaRPr sz="1300" b="0">
+              <a:solidFill>
+                <a:srgbClr val="64748B"/>
+              </a:solidFill>
+              <a:latin typeface="微软雅黑" panose="020B0503020204020204" charset="-122"/>
+            </a:endParaRPr>
           </a:p>
           <a:p>
             <a:pPr algn="l">
@@ -9752,10 +10496,16 @@
                 <a:solidFill>
                   <a:srgbClr val="64748B"/>
                 </a:solidFill>
-                <a:latin typeface="微软雅黑"/>
+                <a:latin typeface="微软雅黑" panose="020B0503020204020204" charset="-122"/>
               </a:rPr>
               <a:t>· 抽取候选知识点</a:t>
             </a:r>
+            <a:endParaRPr sz="1300" b="0">
+              <a:solidFill>
+                <a:srgbClr val="64748B"/>
+              </a:solidFill>
+              <a:latin typeface="微软雅黑" panose="020B0503020204020204" charset="-122"/>
+            </a:endParaRPr>
           </a:p>
           <a:p>
             <a:pPr algn="l">
@@ -9768,10 +10518,16 @@
                 <a:solidFill>
                   <a:srgbClr val="64748B"/>
                 </a:solidFill>
-                <a:latin typeface="微软雅黑"/>
+                <a:latin typeface="微软雅黑" panose="020B0503020204020204" charset="-122"/>
               </a:rPr>
               <a:t>· 提出依赖边候选（带 reason）</a:t>
             </a:r>
+            <a:endParaRPr sz="1300" b="0">
+              <a:solidFill>
+                <a:srgbClr val="64748B"/>
+              </a:solidFill>
+              <a:latin typeface="微软雅黑" panose="020B0503020204020204" charset="-122"/>
+            </a:endParaRPr>
           </a:p>
           <a:p>
             <a:pPr algn="l">
@@ -9784,10 +10540,16 @@
                 <a:solidFill>
                   <a:srgbClr val="64748B"/>
                 </a:solidFill>
-                <a:latin typeface="微软雅黑"/>
+                <a:latin typeface="微软雅黑" panose="020B0503020204020204" charset="-122"/>
               </a:rPr>
               <a:t>· 生成答疑正文</a:t>
             </a:r>
+            <a:endParaRPr sz="1300" b="0">
+              <a:solidFill>
+                <a:srgbClr val="64748B"/>
+              </a:solidFill>
+              <a:latin typeface="微软雅黑" panose="020B0503020204020204" charset="-122"/>
+            </a:endParaRPr>
           </a:p>
         </p:txBody>
       </p:sp>
@@ -9867,10 +10629,16 @@
                 <a:solidFill>
                   <a:srgbClr val="0F172A"/>
                 </a:solidFill>
-                <a:latin typeface="微软雅黑"/>
+                <a:latin typeface="微软雅黑" panose="020B0503020204020204" charset="-122"/>
               </a:rPr>
               <a:t>AI 刻意不承担</a:t>
             </a:r>
+            <a:endParaRPr sz="1700" b="1">
+              <a:solidFill>
+                <a:srgbClr val="0F172A"/>
+              </a:solidFill>
+              <a:latin typeface="微软雅黑" panose="020B0503020204020204" charset="-122"/>
+            </a:endParaRPr>
           </a:p>
         </p:txBody>
       </p:sp>
@@ -9906,10 +10674,16 @@
                 <a:solidFill>
                   <a:srgbClr val="64748B"/>
                 </a:solidFill>
-                <a:latin typeface="微软雅黑"/>
+                <a:latin typeface="微软雅黑" panose="020B0503020204020204" charset="-122"/>
               </a:rPr>
               <a:t>· 依赖图校验 / 环路剪枝</a:t>
             </a:r>
+            <a:endParaRPr sz="1300" b="0">
+              <a:solidFill>
+                <a:srgbClr val="64748B"/>
+              </a:solidFill>
+              <a:latin typeface="微软雅黑" panose="020B0503020204020204" charset="-122"/>
+            </a:endParaRPr>
           </a:p>
           <a:p>
             <a:pPr algn="l">
@@ -9922,10 +10696,16 @@
                 <a:solidFill>
                   <a:srgbClr val="64748B"/>
                 </a:solidFill>
-                <a:latin typeface="微软雅黑"/>
+                <a:latin typeface="微软雅黑" panose="020B0503020204020204" charset="-122"/>
               </a:rPr>
               <a:t>· 学习路径排序</a:t>
             </a:r>
+            <a:endParaRPr sz="1300" b="0">
+              <a:solidFill>
+                <a:srgbClr val="64748B"/>
+              </a:solidFill>
+              <a:latin typeface="微软雅黑" panose="020B0503020204020204" charset="-122"/>
+            </a:endParaRPr>
           </a:p>
           <a:p>
             <a:pPr algn="l">
@@ -9938,10 +10718,16 @@
                 <a:solidFill>
                   <a:srgbClr val="64748B"/>
                 </a:solidFill>
-                <a:latin typeface="微软雅黑"/>
+                <a:latin typeface="微软雅黑" panose="020B0503020204020204" charset="-122"/>
               </a:rPr>
               <a:t>· 卡点根因回溯</a:t>
             </a:r>
+            <a:endParaRPr sz="1300" b="0">
+              <a:solidFill>
+                <a:srgbClr val="64748B"/>
+              </a:solidFill>
+              <a:latin typeface="微软雅黑" panose="020B0503020204020204" charset="-122"/>
+            </a:endParaRPr>
           </a:p>
           <a:p>
             <a:pPr algn="l">
@@ -9954,10 +10740,16 @@
                 <a:solidFill>
                   <a:srgbClr val="64748B"/>
                 </a:solidFill>
-                <a:latin typeface="微软雅黑"/>
+                <a:latin typeface="微软雅黑" panose="020B0503020204020204" charset="-122"/>
               </a:rPr>
               <a:t>· 全部纯标准库、零模型依赖</a:t>
             </a:r>
+            <a:endParaRPr sz="1300" b="0">
+              <a:solidFill>
+                <a:srgbClr val="64748B"/>
+              </a:solidFill>
+              <a:latin typeface="微软雅黑" panose="020B0503020204020204" charset="-122"/>
+            </a:endParaRPr>
           </a:p>
         </p:txBody>
       </p:sp>
@@ -10037,10 +10829,16 @@
                 <a:solidFill>
                   <a:srgbClr val="FFFFFF"/>
                 </a:solidFill>
-                <a:latin typeface="微软雅黑"/>
+                <a:latin typeface="微软雅黑" panose="020B0503020204020204" charset="-122"/>
               </a:rPr>
               <a:t>我们不说「全自动抽取」—— 说「AI 干粗活 + 人做裁决」</a:t>
             </a:r>
+            <a:endParaRPr sz="1800" b="1">
+              <a:solidFill>
+                <a:srgbClr val="FFFFFF"/>
+              </a:solidFill>
+              <a:latin typeface="微软雅黑" panose="020B0503020204020204" charset="-122"/>
+            </a:endParaRPr>
           </a:p>
         </p:txBody>
       </p:sp>
@@ -10076,10 +10874,16 @@
                 <a:solidFill>
                   <a:srgbClr val="64748B"/>
                 </a:solidFill>
-                <a:latin typeface="微软雅黑"/>
+                <a:latin typeface="微软雅黑" panose="020B0503020204020204" charset="-122"/>
               </a:rPr>
               <a:t>代码注释原话：「不调用任何模型 —— 这是 SPEC §4.8『LLM 移出关键路径』的具体落地」</a:t>
             </a:r>
+            <a:endParaRPr sz="1200" b="0">
+              <a:solidFill>
+                <a:srgbClr val="64748B"/>
+              </a:solidFill>
+              <a:latin typeface="微软雅黑" panose="020B0503020204020204" charset="-122"/>
+            </a:endParaRPr>
           </a:p>
           <a:p>
             <a:pPr algn="l">
@@ -10092,10 +10896,16 @@
                 <a:solidFill>
                   <a:srgbClr val="64748B"/>
                 </a:solidFill>
-                <a:latin typeface="微软雅黑"/>
+                <a:latin typeface="微软雅黑" panose="020B0503020204020204" charset="-122"/>
               </a:rPr>
               <a:t>候选边全部带 needs_review 标记 + 理由 + 原文出处，交给复核队列由人采纳或驳回。</a:t>
             </a:r>
+            <a:endParaRPr sz="1200" b="0">
+              <a:solidFill>
+                <a:srgbClr val="64748B"/>
+              </a:solidFill>
+              <a:latin typeface="微软雅黑" panose="020B0503020204020204" charset="-122"/>
+            </a:endParaRPr>
           </a:p>
         </p:txBody>
       </p:sp>
@@ -10175,10 +10985,16 @@
                 <a:solidFill>
                   <a:srgbClr val="64748B"/>
                 </a:solidFill>
-                <a:latin typeface="微软雅黑"/>
+                <a:latin typeface="微软雅黑" panose="020B0503020204020204" charset="-122"/>
               </a:rPr>
               <a:t>析知 XiZhi · 多模态教学智能体</a:t>
             </a:r>
+            <a:endParaRPr sz="1200" b="0">
+              <a:solidFill>
+                <a:srgbClr val="64748B"/>
+              </a:solidFill>
+              <a:latin typeface="微软雅黑" panose="020B0503020204020204" charset="-122"/>
+            </a:endParaRPr>
           </a:p>
         </p:txBody>
       </p:sp>
@@ -10214,10 +11030,16 @@
                 <a:solidFill>
                   <a:srgbClr val="64748B"/>
                 </a:solidFill>
-                <a:latin typeface="微软雅黑"/>
+                <a:latin typeface="微软雅黑" panose="020B0503020204020204" charset="-122"/>
               </a:rPr>
               <a:t>06 / 11</a:t>
             </a:r>
+            <a:endParaRPr sz="1200" b="0">
+              <a:solidFill>
+                <a:srgbClr val="64748B"/>
+              </a:solidFill>
+              <a:latin typeface="微软雅黑" panose="020B0503020204020204" charset="-122"/>
+            </a:endParaRPr>
           </a:p>
         </p:txBody>
       </p:sp>
@@ -10230,7 +11052,7 @@
 </file>
 
 <file path=ppt/slides/slide7.xml><?xml version="1.0" encoding="utf-8"?>
-<p:sld xmlns:a="http://schemas.openxmlformats.org/drawingml/2006/main" xmlns:p="http://schemas.openxmlformats.org/presentationml/2006/main" xmlns:r="http://schemas.openxmlformats.org/officeDocument/2006/relationships">
+<p:sld xmlns:a="http://schemas.openxmlformats.org/drawingml/2006/main" xmlns:r="http://schemas.openxmlformats.org/officeDocument/2006/relationships" xmlns:p="http://schemas.openxmlformats.org/presentationml/2006/main">
   <p:cSld>
     <p:spTree>
       <p:nvGrpSpPr>
@@ -10271,10 +11093,16 @@
                 <a:solidFill>
                   <a:srgbClr val="06B6D4"/>
                 </a:solidFill>
-                <a:latin typeface="微软雅黑"/>
+                <a:latin typeface="微软雅黑" panose="020B0503020204020204" charset="-122"/>
               </a:rPr>
               <a:t>06 · 技术方案 · 校验</a:t>
             </a:r>
+            <a:endParaRPr sz="1100" b="1">
+              <a:solidFill>
+                <a:srgbClr val="06B6D4"/>
+              </a:solidFill>
+              <a:latin typeface="微软雅黑" panose="020B0503020204020204" charset="-122"/>
+            </a:endParaRPr>
           </a:p>
         </p:txBody>
       </p:sp>
@@ -10310,10 +11138,16 @@
                 <a:solidFill>
                   <a:srgbClr val="0F172A"/>
                 </a:solidFill>
-                <a:latin typeface="微软雅黑"/>
+                <a:latin typeface="微软雅黑" panose="020B0503020204020204" charset="-122"/>
               </a:rPr>
               <a:t>工程完整性的可视证据</a:t>
             </a:r>
+            <a:endParaRPr sz="2900" b="1">
+              <a:solidFill>
+                <a:srgbClr val="0F172A"/>
+              </a:solidFill>
+              <a:latin typeface="微软雅黑" panose="020B0503020204020204" charset="-122"/>
+            </a:endParaRPr>
           </a:p>
         </p:txBody>
       </p:sp>
@@ -10393,10 +11227,16 @@
                 <a:solidFill>
                   <a:srgbClr val="06B6D4"/>
                 </a:solidFill>
-                <a:latin typeface="微软雅黑"/>
+                <a:latin typeface="微软雅黑" panose="020B0503020204020204" charset="-122"/>
               </a:rPr>
               <a:t>✓</a:t>
             </a:r>
+            <a:endParaRPr sz="1800" b="1">
+              <a:solidFill>
+                <a:srgbClr val="06B6D4"/>
+              </a:solidFill>
+              <a:latin typeface="微软雅黑" panose="020B0503020204020204" charset="-122"/>
+            </a:endParaRPr>
           </a:p>
         </p:txBody>
       </p:sp>
@@ -10432,10 +11272,16 @@
                 <a:solidFill>
                   <a:srgbClr val="0F172A"/>
                 </a:solidFill>
-                <a:latin typeface="微软雅黑"/>
+                <a:latin typeface="微软雅黑" panose="020B0503020204020204" charset="-122"/>
               </a:rPr>
               <a:t>全链路复验 40 项</a:t>
             </a:r>
+            <a:endParaRPr sz="1600" b="1">
+              <a:solidFill>
+                <a:srgbClr val="0F172A"/>
+              </a:solidFill>
+              <a:latin typeface="微软雅黑" panose="020B0503020204020204" charset="-122"/>
+            </a:endParaRPr>
           </a:p>
         </p:txBody>
       </p:sp>
@@ -10471,10 +11317,16 @@
                 <a:solidFill>
                   <a:srgbClr val="64748B"/>
                 </a:solidFill>
-                <a:latin typeface="微软雅黑"/>
+                <a:latin typeface="微软雅黑" panose="020B0503020204020204" charset="-122"/>
               </a:rPr>
               <a:t>scripts/e2e-check.py · 4 层：路由 / API 契约 / 多轮答疑 / 近期改动</a:t>
             </a:r>
+            <a:endParaRPr sz="1300" b="0">
+              <a:solidFill>
+                <a:srgbClr val="64748B"/>
+              </a:solidFill>
+              <a:latin typeface="微软雅黑" panose="020B0503020204020204" charset="-122"/>
+            </a:endParaRPr>
           </a:p>
         </p:txBody>
       </p:sp>
@@ -10554,10 +11406,16 @@
                 <a:solidFill>
                   <a:srgbClr val="06B6D4"/>
                 </a:solidFill>
-                <a:latin typeface="微软雅黑"/>
+                <a:latin typeface="微软雅黑" panose="020B0503020204020204" charset="-122"/>
               </a:rPr>
               <a:t>✓</a:t>
             </a:r>
+            <a:endParaRPr sz="1800" b="1">
+              <a:solidFill>
+                <a:srgbClr val="06B6D4"/>
+              </a:solidFill>
+              <a:latin typeface="微软雅黑" panose="020B0503020204020204" charset="-122"/>
+            </a:endParaRPr>
           </a:p>
         </p:txBody>
       </p:sp>
@@ -10593,10 +11451,16 @@
                 <a:solidFill>
                   <a:srgbClr val="0F172A"/>
                 </a:solidFill>
-                <a:latin typeface="微软雅黑"/>
+                <a:latin typeface="微软雅黑" panose="020B0503020204020204" charset="-122"/>
               </a:rPr>
               <a:t>部署自检 6 项</a:t>
             </a:r>
+            <a:endParaRPr sz="1600" b="1">
+              <a:solidFill>
+                <a:srgbClr val="0F172A"/>
+              </a:solidFill>
+              <a:latin typeface="微软雅黑" panose="020B0503020204020204" charset="-122"/>
+            </a:endParaRPr>
           </a:p>
         </p:txBody>
       </p:sp>
@@ -10632,10 +11496,16 @@
                 <a:solidFill>
                   <a:srgbClr val="64748B"/>
                 </a:solidFill>
-                <a:latin typeface="微软雅黑"/>
+                <a:latin typeface="微软雅黑" panose="020B0503020204020204" charset="-122"/>
               </a:rPr>
               <a:t>每次部署自动跑（已接进 deploy.sh），含「代码身份」比对</a:t>
             </a:r>
+            <a:endParaRPr sz="1300" b="0">
+              <a:solidFill>
+                <a:srgbClr val="64748B"/>
+              </a:solidFill>
+              <a:latin typeface="微软雅黑" panose="020B0503020204020204" charset="-122"/>
+            </a:endParaRPr>
           </a:p>
         </p:txBody>
       </p:sp>
@@ -10715,10 +11585,16 @@
                 <a:solidFill>
                   <a:srgbClr val="06B6D4"/>
                 </a:solidFill>
-                <a:latin typeface="微软雅黑"/>
+                <a:latin typeface="微软雅黑" panose="020B0503020204020204" charset="-122"/>
               </a:rPr>
               <a:t>✓</a:t>
             </a:r>
+            <a:endParaRPr sz="1800" b="1">
+              <a:solidFill>
+                <a:srgbClr val="06B6D4"/>
+              </a:solidFill>
+              <a:latin typeface="微软雅黑" panose="020B0503020204020204" charset="-122"/>
+            </a:endParaRPr>
           </a:p>
         </p:txBody>
       </p:sp>
@@ -10754,10 +11630,16 @@
                 <a:solidFill>
                   <a:srgbClr val="0F172A"/>
                 </a:solidFill>
-                <a:latin typeface="微软雅黑"/>
+                <a:latin typeface="微软雅黑" panose="020B0503020204020204" charset="-122"/>
               </a:rPr>
               <a:t>依赖图环数 = 0</a:t>
             </a:r>
+            <a:endParaRPr sz="1600" b="1">
+              <a:solidFill>
+                <a:srgbClr val="0F172A"/>
+              </a:solidFill>
+              <a:latin typeface="微软雅黑" panose="020B0503020204020204" charset="-122"/>
+            </a:endParaRPr>
           </a:p>
         </p:txBody>
       </p:sp>
@@ -10793,10 +11675,16 @@
                 <a:solidFill>
                   <a:srgbClr val="64748B"/>
                 </a:solidFill>
-                <a:latin typeface="微软雅黑"/>
+                <a:latin typeface="微软雅黑" panose="020B0503020204020204" charset="-122"/>
               </a:rPr>
               <a:t>工程不变量，可当场复跑；被剪除的边有独立计数</a:t>
             </a:r>
+            <a:endParaRPr sz="1300" b="0">
+              <a:solidFill>
+                <a:srgbClr val="64748B"/>
+              </a:solidFill>
+              <a:latin typeface="微软雅黑" panose="020B0503020204020204" charset="-122"/>
+            </a:endParaRPr>
           </a:p>
         </p:txBody>
       </p:sp>
@@ -10876,10 +11764,16 @@
                 <a:solidFill>
                   <a:srgbClr val="06B6D4"/>
                 </a:solidFill>
-                <a:latin typeface="微软雅黑"/>
+                <a:latin typeface="微软雅黑" panose="020B0503020204020204" charset="-122"/>
               </a:rPr>
               <a:t>✓</a:t>
             </a:r>
+            <a:endParaRPr sz="1800" b="1">
+              <a:solidFill>
+                <a:srgbClr val="06B6D4"/>
+              </a:solidFill>
+              <a:latin typeface="微软雅黑" panose="020B0503020204020204" charset="-122"/>
+            </a:endParaRPr>
           </a:p>
         </p:txBody>
       </p:sp>
@@ -10915,10 +11809,16 @@
                 <a:solidFill>
                   <a:srgbClr val="0F172A"/>
                 </a:solidFill>
-                <a:latin typeface="微软雅黑"/>
+                <a:latin typeface="微软雅黑" panose="020B0503020204020204" charset="-122"/>
               </a:rPr>
               <a:t>hard 边理由完备率 100%</a:t>
             </a:r>
+            <a:endParaRPr sz="1600" b="1">
+              <a:solidFill>
+                <a:srgbClr val="0F172A"/>
+              </a:solidFill>
+              <a:latin typeface="微软雅黑" panose="020B0503020204020204" charset="-122"/>
+            </a:endParaRPr>
           </a:p>
         </p:txBody>
       </p:sp>
@@ -10954,10 +11854,16 @@
                 <a:solidFill>
                   <a:srgbClr val="64748B"/>
                 </a:solidFill>
-                <a:latin typeface="微软雅黑"/>
+                <a:latin typeface="微软雅黑" panose="020B0503020204020204" charset="-122"/>
               </a:rPr>
               <a:t>每条边带 reason + 材料原文引用</a:t>
             </a:r>
+            <a:endParaRPr sz="1300" b="0">
+              <a:solidFill>
+                <a:srgbClr val="64748B"/>
+              </a:solidFill>
+              <a:latin typeface="微软雅黑" panose="020B0503020204020204" charset="-122"/>
+            </a:endParaRPr>
           </a:p>
         </p:txBody>
       </p:sp>
@@ -11037,10 +11943,16 @@
                 <a:solidFill>
                   <a:srgbClr val="06B6D4"/>
                 </a:solidFill>
-                <a:latin typeface="微软雅黑"/>
+                <a:latin typeface="微软雅黑" panose="020B0503020204020204" charset="-122"/>
               </a:rPr>
               <a:t>✓</a:t>
             </a:r>
+            <a:endParaRPr sz="1800" b="1">
+              <a:solidFill>
+                <a:srgbClr val="06B6D4"/>
+              </a:solidFill>
+              <a:latin typeface="微软雅黑" panose="020B0503020204020204" charset="-122"/>
+            </a:endParaRPr>
           </a:p>
         </p:txBody>
       </p:sp>
@@ -11076,10 +11988,16 @@
                 <a:solidFill>
                   <a:srgbClr val="0F172A"/>
                 </a:solidFill>
-                <a:latin typeface="微软雅黑"/>
+                <a:latin typeface="微软雅黑" panose="020B0503020204020204" charset="-122"/>
               </a:rPr>
               <a:t>幻觉率 0</a:t>
             </a:r>
+            <a:endParaRPr sz="1600" b="1">
+              <a:solidFill>
+                <a:srgbClr val="0F172A"/>
+              </a:solidFill>
+              <a:latin typeface="微软雅黑" panose="020B0503020204020204" charset="-122"/>
+            </a:endParaRPr>
           </a:p>
         </p:txBody>
       </p:sp>
@@ -11115,10 +12033,16 @@
                 <a:solidFill>
                   <a:srgbClr val="64748B"/>
                 </a:solidFill>
-                <a:latin typeface="微软雅黑"/>
+                <a:latin typeface="微软雅黑" panose="020B0503020204020204" charset="-122"/>
               </a:rPr>
               <a:t>检索不到就明说「材料里没有」，不猜</a:t>
             </a:r>
+            <a:endParaRPr sz="1300" b="0">
+              <a:solidFill>
+                <a:srgbClr val="64748B"/>
+              </a:solidFill>
+              <a:latin typeface="微软雅黑" panose="020B0503020204020204" charset="-122"/>
+            </a:endParaRPr>
           </a:p>
         </p:txBody>
       </p:sp>
@@ -11198,10 +12122,16 @@
                 <a:solidFill>
                   <a:srgbClr val="3B82F6"/>
                 </a:solidFill>
-                <a:latin typeface="微软雅黑"/>
+                <a:latin typeface="微软雅黑" panose="020B0503020204020204" charset="-122"/>
               </a:rPr>
               <a:t>⭐ 校验不是「我们说测过了」，是「你也能跑一遍」</a:t>
             </a:r>
+            <a:endParaRPr sz="1400" b="1">
+              <a:solidFill>
+                <a:srgbClr val="3B82F6"/>
+              </a:solidFill>
+              <a:latin typeface="微软雅黑" panose="020B0503020204020204" charset="-122"/>
+            </a:endParaRPr>
           </a:p>
         </p:txBody>
       </p:sp>
@@ -11281,10 +12211,16 @@
                 <a:solidFill>
                   <a:srgbClr val="64748B"/>
                 </a:solidFill>
-                <a:latin typeface="微软雅黑"/>
+                <a:latin typeface="微软雅黑" panose="020B0503020204020204" charset="-122"/>
               </a:rPr>
               <a:t>析知 XiZhi · 多模态教学智能体</a:t>
             </a:r>
+            <a:endParaRPr sz="1200" b="0">
+              <a:solidFill>
+                <a:srgbClr val="64748B"/>
+              </a:solidFill>
+              <a:latin typeface="微软雅黑" panose="020B0503020204020204" charset="-122"/>
+            </a:endParaRPr>
           </a:p>
         </p:txBody>
       </p:sp>
@@ -11320,10 +12256,16 @@
                 <a:solidFill>
                   <a:srgbClr val="64748B"/>
                 </a:solidFill>
-                <a:latin typeface="微软雅黑"/>
+                <a:latin typeface="微软雅黑" panose="020B0503020204020204" charset="-122"/>
               </a:rPr>
               <a:t>07 / 11</a:t>
             </a:r>
+            <a:endParaRPr sz="1200" b="0">
+              <a:solidFill>
+                <a:srgbClr val="64748B"/>
+              </a:solidFill>
+              <a:latin typeface="微软雅黑" panose="020B0503020204020204" charset="-122"/>
+            </a:endParaRPr>
           </a:p>
         </p:txBody>
       </p:sp>
@@ -11336,7 +12278,7 @@
 </file>
 
 <file path=ppt/slides/slide8.xml><?xml version="1.0" encoding="utf-8"?>
-<p:sld xmlns:a="http://schemas.openxmlformats.org/drawingml/2006/main" xmlns:p="http://schemas.openxmlformats.org/presentationml/2006/main" xmlns:r="http://schemas.openxmlformats.org/officeDocument/2006/relationships">
+<p:sld xmlns:a="http://schemas.openxmlformats.org/drawingml/2006/main" xmlns:r="http://schemas.openxmlformats.org/officeDocument/2006/relationships" xmlns:p="http://schemas.openxmlformats.org/presentationml/2006/main">
   <p:cSld>
     <p:spTree>
       <p:nvGrpSpPr>
@@ -11377,10 +12319,16 @@
                 <a:solidFill>
                   <a:srgbClr val="06B6D4"/>
                 </a:solidFill>
-                <a:latin typeface="微软雅黑"/>
+                <a:latin typeface="微软雅黑" panose="020B0503020204020204" charset="-122"/>
               </a:rPr>
               <a:t>07 · 演示</a:t>
             </a:r>
+            <a:endParaRPr sz="1100" b="1">
+              <a:solidFill>
+                <a:srgbClr val="06B6D4"/>
+              </a:solidFill>
+              <a:latin typeface="微软雅黑" panose="020B0503020204020204" charset="-122"/>
+            </a:endParaRPr>
           </a:p>
         </p:txBody>
       </p:sp>
@@ -11416,10 +12364,16 @@
                 <a:solidFill>
                   <a:srgbClr val="0F172A"/>
                 </a:solidFill>
-                <a:latin typeface="微软雅黑"/>
+                <a:latin typeface="微软雅黑" panose="020B0503020204020204" charset="-122"/>
               </a:rPr>
               <a:t>可解释的学习路径：每一步都带理由 + 教材原文</a:t>
             </a:r>
+            <a:endParaRPr sz="2900" b="1">
+              <a:solidFill>
+                <a:srgbClr val="0F172A"/>
+              </a:solidFill>
+              <a:latin typeface="微软雅黑" panose="020B0503020204020204" charset="-122"/>
+            </a:endParaRPr>
           </a:p>
         </p:txBody>
       </p:sp>
@@ -11432,7 +12386,7 @@
           <p:nvPr/>
         </p:nvPicPr>
         <p:blipFill>
-          <a:blip r:embed="rId2"/>
+          <a:blip r:embed="rId1"/>
           <a:stretch>
             <a:fillRect/>
           </a:stretch>
@@ -11455,7 +12409,7 @@
         </p:nvSpPr>
         <p:spPr>
           <a:xfrm>
-            <a:off x="758952" y="5760720"/>
+            <a:off x="758952" y="5683250"/>
             <a:ext cx="10698480" cy="548640"/>
           </a:xfrm>
           <a:prstGeom prst="rect">
@@ -11479,10 +12433,16 @@
                 <a:solidFill>
                   <a:srgbClr val="64748B"/>
                 </a:solidFill>
-                <a:latin typeface="微软雅黑"/>
+                <a:latin typeface="微软雅黑" panose="020B0503020204020204" charset="-122"/>
               </a:rPr>
               <a:t>以「慢启动的第二种场景」为目标的实测 3 步路径；⭐ 有一条跨章边最强：教材原文自己写了「Recall how TCP's sliding window algorithm works」</a:t>
             </a:r>
+            <a:endParaRPr sz="1300" b="0">
+              <a:solidFill>
+                <a:srgbClr val="64748B"/>
+              </a:solidFill>
+              <a:latin typeface="微软雅黑" panose="020B0503020204020204" charset="-122"/>
+            </a:endParaRPr>
           </a:p>
         </p:txBody>
       </p:sp>
@@ -11562,10 +12522,16 @@
                 <a:solidFill>
                   <a:srgbClr val="64748B"/>
                 </a:solidFill>
-                <a:latin typeface="微软雅黑"/>
+                <a:latin typeface="微软雅黑" panose="020B0503020204020204" charset="-122"/>
               </a:rPr>
               <a:t>析知 XiZhi · 多模态教学智能体</a:t>
             </a:r>
+            <a:endParaRPr sz="1200" b="0">
+              <a:solidFill>
+                <a:srgbClr val="64748B"/>
+              </a:solidFill>
+              <a:latin typeface="微软雅黑" panose="020B0503020204020204" charset="-122"/>
+            </a:endParaRPr>
           </a:p>
         </p:txBody>
       </p:sp>
@@ -11601,10 +12567,16 @@
                 <a:solidFill>
                   <a:srgbClr val="64748B"/>
                 </a:solidFill>
-                <a:latin typeface="微软雅黑"/>
+                <a:latin typeface="微软雅黑" panose="020B0503020204020204" charset="-122"/>
               </a:rPr>
               <a:t>08 / 11</a:t>
             </a:r>
+            <a:endParaRPr sz="1200" b="0">
+              <a:solidFill>
+                <a:srgbClr val="64748B"/>
+              </a:solidFill>
+              <a:latin typeface="微软雅黑" panose="020B0503020204020204" charset="-122"/>
+            </a:endParaRPr>
           </a:p>
         </p:txBody>
       </p:sp>
@@ -11617,7 +12589,7 @@
 </file>
 
 <file path=ppt/slides/slide9.xml><?xml version="1.0" encoding="utf-8"?>
-<p:sld xmlns:a="http://schemas.openxmlformats.org/drawingml/2006/main" xmlns:p="http://schemas.openxmlformats.org/presentationml/2006/main" xmlns:r="http://schemas.openxmlformats.org/officeDocument/2006/relationships">
+<p:sld xmlns:a="http://schemas.openxmlformats.org/drawingml/2006/main" xmlns:r="http://schemas.openxmlformats.org/officeDocument/2006/relationships" xmlns:p="http://schemas.openxmlformats.org/presentationml/2006/main">
   <p:cSld>
     <p:spTree>
       <p:nvGrpSpPr>
@@ -11658,10 +12630,16 @@
                 <a:solidFill>
                   <a:srgbClr val="EA580C"/>
                 </a:solidFill>
-                <a:latin typeface="微软雅黑"/>
+                <a:latin typeface="微软雅黑" panose="020B0503020204020204" charset="-122"/>
               </a:rPr>
               <a:t>08 · 我们主动说的不足 · ★ 这一页是差异化</a:t>
             </a:r>
+            <a:endParaRPr sz="1100" b="1">
+              <a:solidFill>
+                <a:srgbClr val="EA580C"/>
+              </a:solidFill>
+              <a:latin typeface="微软雅黑" panose="020B0503020204020204" charset="-122"/>
+            </a:endParaRPr>
           </a:p>
         </p:txBody>
       </p:sp>
@@ -11697,10 +12675,16 @@
                 <a:solidFill>
                   <a:srgbClr val="0F172A"/>
                 </a:solidFill>
-                <a:latin typeface="微软雅黑"/>
+                <a:latin typeface="微软雅黑" panose="020B0503020204020204" charset="-122"/>
               </a:rPr>
               <a:t>两个瑕疵，以及我们怎么处置的</a:t>
             </a:r>
+            <a:endParaRPr sz="2900" b="1">
+              <a:solidFill>
+                <a:srgbClr val="0F172A"/>
+              </a:solidFill>
+              <a:latin typeface="微软雅黑" panose="020B0503020204020204" charset="-122"/>
+            </a:endParaRPr>
           </a:p>
         </p:txBody>
       </p:sp>
@@ -11824,10 +12808,16 @@
                 <a:solidFill>
                   <a:srgbClr val="EA580C"/>
                 </a:solidFill>
-                <a:latin typeface="微软雅黑"/>
+                <a:latin typeface="微软雅黑" panose="020B0503020204020204" charset="-122"/>
               </a:rPr>
               <a:t>瑕疵一 · 数据有过重复</a:t>
             </a:r>
+            <a:endParaRPr sz="1600" b="1">
+              <a:solidFill>
+                <a:srgbClr val="EA580C"/>
+              </a:solidFill>
+              <a:latin typeface="微软雅黑" panose="020B0503020204020204" charset="-122"/>
+            </a:endParaRPr>
           </a:p>
         </p:txBody>
       </p:sp>
@@ -11863,10 +12853,16 @@
                 <a:solidFill>
                   <a:srgbClr val="334155"/>
                 </a:solidFill>
-                <a:latin typeface="微软雅黑"/>
+                <a:latin typeface="微软雅黑" panose="020B0503020204020204" charset="-122"/>
               </a:rPr>
               <a:t>早先版本里同一份材料被抽了多遍，副本混进图里。</a:t>
             </a:r>
+            <a:endParaRPr sz="1300" b="0">
+              <a:solidFill>
+                <a:srgbClr val="334155"/>
+              </a:solidFill>
+              <a:latin typeface="微软雅黑" panose="020B0503020204020204" charset="-122"/>
+            </a:endParaRPr>
           </a:p>
           <a:p>
             <a:pPr algn="l">
@@ -11879,10 +12875,16 @@
                 <a:solidFill>
                   <a:srgbClr val="334155"/>
                 </a:solidFill>
-                <a:latin typeface="微软雅黑"/>
+                <a:latin typeface="微软雅黑" panose="020B0503020204020204" charset="-122"/>
               </a:rPr>
               <a:t>根因是一个可定位的 bug（「章内序号」被当成全局序号用）—— 已修 + 已重跑：</a:t>
             </a:r>
+            <a:endParaRPr sz="1300" b="0">
+              <a:solidFill>
+                <a:srgbClr val="334155"/>
+              </a:solidFill>
+              <a:latin typeface="微软雅黑" panose="020B0503020204020204" charset="-122"/>
+            </a:endParaRPr>
           </a:p>
           <a:p>
             <a:pPr algn="l">
@@ -11895,10 +12897,16 @@
                 <a:solidFill>
                   <a:srgbClr val="334155"/>
                 </a:solidFill>
-                <a:latin typeface="微软雅黑"/>
+                <a:latin typeface="微软雅黑" panose="020B0503020204020204" charset="-122"/>
               </a:rPr>
               <a:t>副本从 483（bug 产物）降到 67（材料本身的真重复，我们只标注、不删数据）。</a:t>
             </a:r>
+            <a:endParaRPr sz="1300" b="0">
+              <a:solidFill>
+                <a:srgbClr val="334155"/>
+              </a:solidFill>
+              <a:latin typeface="微软雅黑" panose="020B0503020204020204" charset="-122"/>
+            </a:endParaRPr>
           </a:p>
         </p:txBody>
       </p:sp>
@@ -12022,10 +13030,16 @@
                 <a:solidFill>
                   <a:srgbClr val="EA580C"/>
                 </a:solidFill>
-                <a:latin typeface="微软雅黑"/>
+                <a:latin typeface="微软雅黑" panose="020B0503020204020204" charset="-122"/>
               </a:rPr>
               <a:t>瑕疵二 · 有一条边与 AI 判向相反</a:t>
             </a:r>
+            <a:endParaRPr sz="1600" b="1">
+              <a:solidFill>
+                <a:srgbClr val="EA580C"/>
+              </a:solidFill>
+              <a:latin typeface="微软雅黑" panose="020B0503020204020204" charset="-122"/>
+            </a:endParaRPr>
           </a:p>
         </p:txBody>
       </p:sp>
@@ -12061,10 +13075,16 @@
                 <a:solidFill>
                   <a:srgbClr val="334155"/>
                 </a:solidFill>
-                <a:latin typeface="微软雅黑"/>
+                <a:latin typeface="微软雅黑" panose="020B0503020204020204" charset="-122"/>
               </a:rPr>
               <a:t>AI 按文档顺序抽出的方向是「滑动窗口 → TCP」，而我们读原文判定：要先懂 TCP 的字节流。</a:t>
             </a:r>
+            <a:endParaRPr sz="1300" b="0">
+              <a:solidFill>
+                <a:srgbClr val="334155"/>
+              </a:solidFill>
+              <a:latin typeface="微软雅黑" panose="020B0503020204020204" charset="-122"/>
+            </a:endParaRPr>
           </a:p>
           <a:p>
             <a:pPr algn="l">
@@ -12077,10 +13097,16 @@
                 <a:solidFill>
                   <a:srgbClr val="334155"/>
                 </a:solidFill>
-                <a:latin typeface="微软雅黑"/>
+                <a:latin typeface="微软雅黑" panose="020B0503020204020204" charset="-122"/>
               </a:rPr>
               <a:t>我们不灌它，留在复核队列 —— 它正好是「人做裁决」的实例。</a:t>
             </a:r>
+            <a:endParaRPr sz="1300" b="0">
+              <a:solidFill>
+                <a:srgbClr val="334155"/>
+              </a:solidFill>
+              <a:latin typeface="微软雅黑" panose="020B0503020204020204" charset="-122"/>
+            </a:endParaRPr>
           </a:p>
         </p:txBody>
       </p:sp>
@@ -12116,10 +13142,16 @@
                 <a:solidFill>
                   <a:srgbClr val="0F172A"/>
                 </a:solidFill>
-                <a:latin typeface="微软雅黑"/>
+                <a:latin typeface="微软雅黑" panose="020B0503020204020204" charset="-122"/>
               </a:rPr>
               <a:t>⇒ 我们宁可显示「不知道」，不显示「像知道」。</a:t>
             </a:r>
+            <a:endParaRPr sz="1400" b="1">
+              <a:solidFill>
+                <a:srgbClr val="0F172A"/>
+              </a:solidFill>
+              <a:latin typeface="微软雅黑" panose="020B0503020204020204" charset="-122"/>
+            </a:endParaRPr>
           </a:p>
         </p:txBody>
       </p:sp>
@@ -12199,10 +13231,16 @@
                 <a:solidFill>
                   <a:srgbClr val="64748B"/>
                 </a:solidFill>
-                <a:latin typeface="微软雅黑"/>
+                <a:latin typeface="微软雅黑" panose="020B0503020204020204" charset="-122"/>
               </a:rPr>
               <a:t>析知 XiZhi · 多模态教学智能体</a:t>
             </a:r>
+            <a:endParaRPr sz="1200" b="0">
+              <a:solidFill>
+                <a:srgbClr val="64748B"/>
+              </a:solidFill>
+              <a:latin typeface="微软雅黑" panose="020B0503020204020204" charset="-122"/>
+            </a:endParaRPr>
           </a:p>
         </p:txBody>
       </p:sp>
@@ -12238,10 +13276,16 @@
                 <a:solidFill>
                   <a:srgbClr val="64748B"/>
                 </a:solidFill>
-                <a:latin typeface="微软雅黑"/>
+                <a:latin typeface="微软雅黑" panose="020B0503020204020204" charset="-122"/>
               </a:rPr>
               <a:t>09 / 11</a:t>
             </a:r>
+            <a:endParaRPr sz="1200" b="0">
+              <a:solidFill>
+                <a:srgbClr val="64748B"/>
+              </a:solidFill>
+              <a:latin typeface="微软雅黑" panose="020B0503020204020204" charset="-122"/>
+            </a:endParaRPr>
           </a:p>
         </p:txBody>
       </p:sp>
@@ -12251,6 +13295,114 @@
     <a:masterClrMapping/>
   </p:clrMapOvr>
 </p:sld>
+</file>
+
+<file path=ppt/tags/tag1.xml><?xml version="1.0" encoding="utf-8"?>
+<p:tagLst xmlns:p="http://schemas.openxmlformats.org/presentationml/2006/main">
+  <p:tag name="KSO_WM_DIAGRAM_VIRTUALLY_FRAME" val="{&quot;height&quot;:270,&quot;left&quot;:59.760000000000005,&quot;top&quot;:133.2,&quot;width&quot;:842.4}"/>
+</p:tagLst>
+</file>
+
+<file path=ppt/tags/tag10.xml><?xml version="1.0" encoding="utf-8"?>
+<p:tagLst xmlns:p="http://schemas.openxmlformats.org/presentationml/2006/main">
+  <p:tag name="KSO_WM_DIAGRAM_VIRTUALLY_FRAME" val="{&quot;height&quot;:270,&quot;left&quot;:59.760000000000005,&quot;top&quot;:133.2,&quot;width&quot;:842.4}"/>
+</p:tagLst>
+</file>
+
+<file path=ppt/tags/tag11.xml><?xml version="1.0" encoding="utf-8"?>
+<p:tagLst xmlns:p="http://schemas.openxmlformats.org/presentationml/2006/main">
+  <p:tag name="KSO_WM_DIAGRAM_VIRTUALLY_FRAME" val="{&quot;height&quot;:270,&quot;left&quot;:59.760000000000005,&quot;top&quot;:133.2,&quot;width&quot;:842.4}"/>
+</p:tagLst>
+</file>
+
+<file path=ppt/tags/tag12.xml><?xml version="1.0" encoding="utf-8"?>
+<p:tagLst xmlns:p="http://schemas.openxmlformats.org/presentationml/2006/main">
+  <p:tag name="KSO_WM_DIAGRAM_VIRTUALLY_FRAME" val="{&quot;height&quot;:270,&quot;left&quot;:59.760000000000005,&quot;top&quot;:133.2,&quot;width&quot;:842.4}"/>
+</p:tagLst>
+</file>
+
+<file path=ppt/tags/tag13.xml><?xml version="1.0" encoding="utf-8"?>
+<p:tagLst xmlns:p="http://schemas.openxmlformats.org/presentationml/2006/main">
+  <p:tag name="KSO_WM_DIAGRAM_VIRTUALLY_FRAME" val="{&quot;height&quot;:270,&quot;left&quot;:59.760000000000005,&quot;top&quot;:133.2,&quot;width&quot;:842.4}"/>
+</p:tagLst>
+</file>
+
+<file path=ppt/tags/tag14.xml><?xml version="1.0" encoding="utf-8"?>
+<p:tagLst xmlns:p="http://schemas.openxmlformats.org/presentationml/2006/main">
+  <p:tag name="KSO_WM_DIAGRAM_VIRTUALLY_FRAME" val="{&quot;height&quot;:270,&quot;left&quot;:59.760000000000005,&quot;top&quot;:133.2,&quot;width&quot;:842.4}"/>
+</p:tagLst>
+</file>
+
+<file path=ppt/tags/tag15.xml><?xml version="1.0" encoding="utf-8"?>
+<p:tagLst xmlns:p="http://schemas.openxmlformats.org/presentationml/2006/main">
+  <p:tag name="KSO_WM_DIAGRAM_VIRTUALLY_FRAME" val="{&quot;height&quot;:270,&quot;left&quot;:59.760000000000005,&quot;top&quot;:133.2,&quot;width&quot;:842.4}"/>
+</p:tagLst>
+</file>
+
+<file path=ppt/tags/tag16.xml><?xml version="1.0" encoding="utf-8"?>
+<p:tagLst xmlns:p="http://schemas.openxmlformats.org/presentationml/2006/main">
+  <p:tag name="KSO_WM_DIAGRAM_VIRTUALLY_FRAME" val="{&quot;height&quot;:270,&quot;left&quot;:59.760000000000005,&quot;top&quot;:133.2,&quot;width&quot;:842.4}"/>
+</p:tagLst>
+</file>
+
+<file path=ppt/tags/tag17.xml><?xml version="1.0" encoding="utf-8"?>
+<p:tagLst xmlns:p="http://schemas.openxmlformats.org/presentationml/2006/main">
+  <p:tag name="KSO_WM_DIAGRAM_VIRTUALLY_FRAME" val="{&quot;height&quot;:270,&quot;left&quot;:59.760000000000005,&quot;top&quot;:133.2,&quot;width&quot;:842.4}"/>
+</p:tagLst>
+</file>
+
+<file path=ppt/tags/tag18.xml><?xml version="1.0" encoding="utf-8"?>
+<p:tagLst xmlns:p="http://schemas.openxmlformats.org/presentationml/2006/main">
+  <p:tag name="KSO_WM_DIAGRAM_VIRTUALLY_FRAME" val="{&quot;height&quot;:270,&quot;left&quot;:59.760000000000005,&quot;top&quot;:133.2,&quot;width&quot;:842.4}"/>
+</p:tagLst>
+</file>
+
+<file path=ppt/tags/tag2.xml><?xml version="1.0" encoding="utf-8"?>
+<p:tagLst xmlns:p="http://schemas.openxmlformats.org/presentationml/2006/main">
+  <p:tag name="KSO_WM_DIAGRAM_VIRTUALLY_FRAME" val="{&quot;height&quot;:270,&quot;left&quot;:59.760000000000005,&quot;top&quot;:133.2,&quot;width&quot;:842.4}"/>
+</p:tagLst>
+</file>
+
+<file path=ppt/tags/tag3.xml><?xml version="1.0" encoding="utf-8"?>
+<p:tagLst xmlns:p="http://schemas.openxmlformats.org/presentationml/2006/main">
+  <p:tag name="KSO_WM_DIAGRAM_VIRTUALLY_FRAME" val="{&quot;height&quot;:270,&quot;left&quot;:59.760000000000005,&quot;top&quot;:133.2,&quot;width&quot;:842.4}"/>
+</p:tagLst>
+</file>
+
+<file path=ppt/tags/tag4.xml><?xml version="1.0" encoding="utf-8"?>
+<p:tagLst xmlns:p="http://schemas.openxmlformats.org/presentationml/2006/main">
+  <p:tag name="KSO_WM_DIAGRAM_VIRTUALLY_FRAME" val="{&quot;height&quot;:270,&quot;left&quot;:59.760000000000005,&quot;top&quot;:133.2,&quot;width&quot;:842.4}"/>
+</p:tagLst>
+</file>
+
+<file path=ppt/tags/tag5.xml><?xml version="1.0" encoding="utf-8"?>
+<p:tagLst xmlns:p="http://schemas.openxmlformats.org/presentationml/2006/main">
+  <p:tag name="KSO_WM_DIAGRAM_VIRTUALLY_FRAME" val="{&quot;height&quot;:270,&quot;left&quot;:59.760000000000005,&quot;top&quot;:133.2,&quot;width&quot;:842.4}"/>
+</p:tagLst>
+</file>
+
+<file path=ppt/tags/tag6.xml><?xml version="1.0" encoding="utf-8"?>
+<p:tagLst xmlns:p="http://schemas.openxmlformats.org/presentationml/2006/main">
+  <p:tag name="KSO_WM_DIAGRAM_VIRTUALLY_FRAME" val="{&quot;height&quot;:270,&quot;left&quot;:59.760000000000005,&quot;top&quot;:133.2,&quot;width&quot;:842.4}"/>
+</p:tagLst>
+</file>
+
+<file path=ppt/tags/tag7.xml><?xml version="1.0" encoding="utf-8"?>
+<p:tagLst xmlns:p="http://schemas.openxmlformats.org/presentationml/2006/main">
+  <p:tag name="KSO_WM_DIAGRAM_VIRTUALLY_FRAME" val="{&quot;height&quot;:270,&quot;left&quot;:59.760000000000005,&quot;top&quot;:133.2,&quot;width&quot;:842.4}"/>
+</p:tagLst>
+</file>
+
+<file path=ppt/tags/tag8.xml><?xml version="1.0" encoding="utf-8"?>
+<p:tagLst xmlns:p="http://schemas.openxmlformats.org/presentationml/2006/main">
+  <p:tag name="KSO_WM_DIAGRAM_VIRTUALLY_FRAME" val="{&quot;height&quot;:270,&quot;left&quot;:59.760000000000005,&quot;top&quot;:133.2,&quot;width&quot;:842.4}"/>
+</p:tagLst>
+</file>
+
+<file path=ppt/tags/tag9.xml><?xml version="1.0" encoding="utf-8"?>
+<p:tagLst xmlns:p="http://schemas.openxmlformats.org/presentationml/2006/main">
+  <p:tag name="KSO_WM_DIAGRAM_VIRTUALLY_FRAME" val="{&quot;height&quot;:270,&quot;left&quot;:59.760000000000005,&quot;top&quot;:133.2,&quot;width&quot;:842.4}"/>
+</p:tagLst>
 </file>
 
 <file path=ppt/theme/theme1.xml><?xml version="1.0" encoding="utf-8"?>
@@ -12569,6 +13721,10 @@
       </a:style>
     </a:lnDef>
   </a:objectDefaults>
-  <a:extraClrSchemeLst/>
+  <a:extLst>
+    <a:ext uri="{05A4C25C-085E-4340-85A3-A5531E510DB2}">
+      <thm15:themeFamily xmlns:thm15="http://schemas.microsoft.com/office/thememl/2012/main" name="Office Theme" id="{62F939B6-93AF-4DB8-9C6B-D6C7DFDC589F}" vid="{4A3C46E8-61CC-4603-A589-7422A47A8E4A}"/>
+    </a:ext>
+  </a:extLst>
 </a:theme>
 </file>
--- a/docs/ppt/析知XiZhi-作品介绍-最终版.pptx
+++ b/docs/ppt/析知XiZhi-作品介绍-最终版.pptx
@@ -3071,50 +3071,6 @@
         <p:nvPr/>
       </p:nvGrpSpPr>
       <p:grpSpPr/>
-      <p:sp>
-        <p:nvSpPr>
-          <p:cNvPr id="2" name="Rectangle 1"/>
-          <p:cNvSpPr/>
-          <p:nvPr/>
-        </p:nvSpPr>
-        <p:spPr>
-          <a:xfrm>
-            <a:off x="8351215" y="0"/>
-            <a:ext cx="3840480" cy="2377440"/>
-          </a:xfrm>
-          <a:prstGeom prst="rect">
-            <a:avLst/>
-          </a:prstGeom>
-          <a:solidFill>
-            <a:srgbClr val="EFF4FE"/>
-          </a:solidFill>
-          <a:ln>
-            <a:noFill/>
-          </a:ln>
-          <a:effectLst/>
-        </p:spPr>
-        <p:style>
-          <a:lnRef idx="1">
-            <a:schemeClr val="accent1"/>
-          </a:lnRef>
-          <a:fillRef idx="3">
-            <a:schemeClr val="accent1"/>
-          </a:fillRef>
-          <a:effectRef idx="2">
-            <a:schemeClr val="accent1"/>
-          </a:effectRef>
-          <a:fontRef idx="minor">
-            <a:schemeClr val="lt1"/>
-          </a:fontRef>
-        </p:style>
-        <p:txBody>
-          <a:bodyPr rtlCol="0" anchor="ctr"/>
-          <a:lstStyle/>
-          <a:p>
-            <a:pPr algn="ctr"/>
-          </a:p>
-        </p:txBody>
-      </p:sp>
       <p:sp>
         <p:nvSpPr>
           <p:cNvPr id="3" name="Rounded Rectangle 2"/>
